--- a/courses/build/teach-the-teachers/T-D1.pptx
+++ b/courses/build/teach-the-teachers/T-D1.pptx
@@ -4874,7 +4874,7 @@
     <p:bg>
       <p:bgPr>
         <a:solidFill>
-          <a:srgbClr val="1F4D2B"/>
+          <a:srgbClr val="2F3A33"/>
         </a:solidFill>
         <a:effectLst/>
       </p:bgPr>
@@ -4916,9 +4916,9 @@
             <a:r>
               <a:rPr sz="1000" b="0">
                 <a:solidFill>
-                  <a:srgbClr val="A8D88A"/>
-                </a:solidFill>
-                <a:latin typeface="Arial"/>
+                  <a:srgbClr val="F2EFE6"/>
+                </a:solidFill>
+                <a:latin typeface="Trebuchet MS"/>
               </a:rPr>
               <a:t>T-D1-01   ·   Poster T-P01</a:t>
             </a:r>
@@ -4955,9 +4955,9 @@
             <a:r>
               <a:rPr sz="1000" b="0">
                 <a:solidFill>
-                  <a:srgbClr val="A8D88A"/>
-                </a:solidFill>
-                <a:latin typeface="Arial"/>
+                  <a:srgbClr val="F2EFE6"/>
+                </a:solidFill>
+                <a:latin typeface="Trebuchet MS"/>
               </a:rPr>
               <a:t>Teach the Teachers</a:t>
             </a:r>
@@ -4994,9 +4994,9 @@
             <a:r>
               <a:rPr sz="4800" b="1">
                 <a:solidFill>
-                  <a:srgbClr val="F7F2E9"/>
-                </a:solidFill>
-                <a:latin typeface="Georgia"/>
+                  <a:srgbClr val="F2EFE6"/>
+                </a:solidFill>
+                <a:latin typeface="Segoe Print"/>
               </a:rPr>
               <a:t>Welcome</a:t>
             </a:r>
@@ -5018,7 +5018,7 @@
             <a:avLst/>
           </a:prstGeom>
           <a:solidFill>
-            <a:srgbClr val="C07A1E"/>
+            <a:srgbClr val="D2452C"/>
           </a:solidFill>
           <a:ln>
             <a:noFill/>
@@ -5077,9 +5077,9 @@
             <a:r>
               <a:rPr sz="2400" b="0">
                 <a:solidFill>
-                  <a:srgbClr val="A8D88A"/>
-                </a:solidFill>
-                <a:latin typeface="Arial"/>
+                  <a:srgbClr val="F2EFE6"/>
+                </a:solidFill>
+                <a:latin typeface="Trebuchet MS"/>
               </a:rPr>
               <a:t>Teach the Teachers</a:t>
             </a:r>
@@ -5093,9 +5093,9 @@
             <a:r>
               <a:rPr sz="2400" b="0">
                 <a:solidFill>
-                  <a:srgbClr val="A8D88A"/>
-                </a:solidFill>
-                <a:latin typeface="Arial"/>
+                  <a:srgbClr val="F2EFE6"/>
+                </a:solidFill>
+                <a:latin typeface="Trebuchet MS"/>
               </a:rPr>
               <a:t>Day 1 of 5 · Learners first</a:t>
             </a:r>
@@ -5117,11 +5117,11 @@
             <a:avLst/>
           </a:prstGeom>
           <a:solidFill>
-            <a:srgbClr val="FBF6EC"/>
+            <a:srgbClr val="C9A77C"/>
           </a:solidFill>
           <a:ln w="15875">
             <a:solidFill>
-              <a:srgbClr val="E2D8C4"/>
+              <a:srgbClr val="2C6FB7"/>
             </a:solidFill>
           </a:ln>
           <a:effectLst/>
@@ -5178,9 +5178,9 @@
             <a:r>
               <a:rPr sz="1200" b="1">
                 <a:solidFill>
-                  <a:srgbClr val="C07A1E"/>
-                </a:solidFill>
-                <a:latin typeface="Arial"/>
+                  <a:srgbClr val="D2452C"/>
+                </a:solidFill>
+                <a:latin typeface="Trebuchet MS"/>
               </a:rPr>
               <a:t>IMAGE · T-IMG-01 · coming</a:t>
             </a:r>
@@ -5217,9 +5217,9 @@
             <a:r>
               <a:rPr sz="1800" b="1">
                 <a:solidFill>
-                  <a:srgbClr val="1F4D2B"/>
-                </a:solidFill>
-                <a:latin typeface="Georgia"/>
+                  <a:srgbClr val="1C1C1C"/>
+                </a:solidFill>
+                <a:latin typeface="Segoe Print"/>
               </a:rPr>
               <a:t>A learning circle under a tree</a:t>
             </a:r>
@@ -5256,9 +5256,9 @@
             <a:r>
               <a:rPr sz="1100" b="0">
                 <a:solidFill>
-                  <a:srgbClr val="20190F"/>
-                </a:solidFill>
-                <a:latin typeface="Arial"/>
+                  <a:srgbClr val="1C1C1C"/>
+                </a:solidFill>
+                <a:latin typeface="Trebuchet MS"/>
               </a:rPr>
               <a:t>Twenty adults sit in a wide circle on plastic chairs and a wooden bench under a big shade tree beside a rural community hall. Mixed ages: young graduates in trainers and T-shirts, two extension officers in work shirts, gogos in headscarves, an older lead farmer in a hat. One young woman stands, mid-sentence, hands open; others lean in, some laughing.…</a:t>
             </a:r>
@@ -5279,7 +5279,7 @@
     <p:bg>
       <p:bgPr>
         <a:solidFill>
-          <a:srgbClr val="F7F2E9"/>
+          <a:srgbClr val="C9A77C"/>
         </a:solidFill>
         <a:effectLst/>
       </p:bgPr>
@@ -5321,9 +5321,9 @@
             <a:r>
               <a:rPr sz="1000" b="0">
                 <a:solidFill>
-                  <a:srgbClr val="6B6255"/>
-                </a:solidFill>
-                <a:latin typeface="Arial"/>
+                  <a:srgbClr val="1C1C1C"/>
+                </a:solidFill>
+                <a:latin typeface="Trebuchet MS"/>
               </a:rPr>
               <a:t>T-D1-10   ·   Poster T-P19</a:t>
             </a:r>
@@ -5360,9 +5360,9 @@
             <a:r>
               <a:rPr sz="1000" b="0">
                 <a:solidFill>
-                  <a:srgbClr val="6B6255"/>
-                </a:solidFill>
-                <a:latin typeface="Arial"/>
+                  <a:srgbClr val="1C1C1C"/>
+                </a:solidFill>
+                <a:latin typeface="Trebuchet MS"/>
               </a:rPr>
               <a:t>Teach the Teachers</a:t>
             </a:r>
@@ -5384,7 +5384,7 @@
             <a:avLst/>
           </a:prstGeom>
           <a:solidFill>
-            <a:srgbClr val="C07A1E"/>
+            <a:srgbClr val="D2452C"/>
           </a:solidFill>
           <a:ln>
             <a:noFill/>
@@ -5443,9 +5443,9 @@
             <a:r>
               <a:rPr sz="1400" b="1">
                 <a:solidFill>
-                  <a:srgbClr val="F7F2E9"/>
-                </a:solidFill>
-                <a:latin typeface="Arial"/>
+                  <a:srgbClr val="C9A77C"/>
+                </a:solidFill>
+                <a:latin typeface="Trebuchet MS"/>
               </a:rPr>
               <a:t>YOUR TURN</a:t>
             </a:r>
@@ -5482,9 +5482,9 @@
             <a:r>
               <a:rPr sz="3800" b="1">
                 <a:solidFill>
-                  <a:srgbClr val="1F4D2B"/>
-                </a:solidFill>
-                <a:latin typeface="Georgia"/>
+                  <a:srgbClr val="1C1C1C"/>
+                </a:solidFill>
+                <a:latin typeface="Segoe Print"/>
               </a:rPr>
               <a:t>Sort the practices</a:t>
             </a:r>
@@ -5506,7 +5506,7 @@
             <a:avLst/>
           </a:prstGeom>
           <a:solidFill>
-            <a:srgbClr val="E2D8C4"/>
+            <a:srgbClr val="2C6FB7"/>
           </a:solidFill>
           <a:ln>
             <a:noFill/>
@@ -5565,9 +5565,9 @@
             <a:r>
               <a:rPr sz="2600" b="1">
                 <a:solidFill>
-                  <a:srgbClr val="20190F"/>
-                </a:solidFill>
-                <a:latin typeface="Arial"/>
+                  <a:srgbClr val="1C1C1C"/>
+                </a:solidFill>
+                <a:latin typeface="Trebuchet MS"/>
               </a:rPr>
               <a:t>•  Put each photo under an idea</a:t>
             </a:r>
@@ -5581,9 +5581,9 @@
             <a:r>
               <a:rPr sz="2600" b="1">
                 <a:solidFill>
-                  <a:srgbClr val="20190F"/>
-                </a:solidFill>
-                <a:latin typeface="Arial"/>
+                  <a:srgbClr val="1C1C1C"/>
+                </a:solidFill>
+                <a:latin typeface="Trebuchet MS"/>
               </a:rPr>
               <a:t>•  Our strongest three, weakest one</a:t>
             </a:r>
@@ -5597,9 +5597,9 @@
             <a:r>
               <a:rPr sz="2600" b="1">
                 <a:solidFill>
-                  <a:srgbClr val="20190F"/>
-                </a:solidFill>
-                <a:latin typeface="Arial"/>
+                  <a:srgbClr val="1C1C1C"/>
+                </a:solidFill>
+                <a:latin typeface="Trebuchet MS"/>
               </a:rPr>
               <a:t>•  15 minutes</a:t>
             </a:r>
@@ -5621,11 +5621,11 @@
             <a:avLst/>
           </a:prstGeom>
           <a:solidFill>
-            <a:srgbClr val="FBF6EC"/>
+            <a:srgbClr val="C9A77C"/>
           </a:solidFill>
           <a:ln w="15875">
             <a:solidFill>
-              <a:srgbClr val="E2D8C4"/>
+              <a:srgbClr val="2C6FB7"/>
             </a:solidFill>
           </a:ln>
           <a:effectLst/>
@@ -5682,9 +5682,9 @@
             <a:r>
               <a:rPr sz="1200" b="1">
                 <a:solidFill>
-                  <a:srgbClr val="C07A1E"/>
-                </a:solidFill>
-                <a:latin typeface="Arial"/>
+                  <a:srgbClr val="D2452C"/>
+                </a:solidFill>
+                <a:latin typeface="Trebuchet MS"/>
               </a:rPr>
               <a:t>POSTER ART · T-P19-ART · coming</a:t>
             </a:r>
@@ -5721,9 +5721,9 @@
             <a:r>
               <a:rPr sz="1800" b="1">
                 <a:solidFill>
-                  <a:srgbClr val="1F4D2B"/>
-                </a:solidFill>
-                <a:latin typeface="Georgia"/>
+                  <a:srgbClr val="1C1C1C"/>
+                </a:solidFill>
+                <a:latin typeface="Segoe Print"/>
               </a:rPr>
               <a:t>Artwork for T-P19 · The 10 elements of agroecology</a:t>
             </a:r>
@@ -5760,9 +5760,9 @@
             <a:r>
               <a:rPr sz="1100" b="0">
                 <a:solidFill>
-                  <a:srgbClr val="20190F"/>
-                </a:solidFill>
-                <a:latin typeface="Arial"/>
+                  <a:srgbClr val="1C1C1C"/>
+                </a:solidFill>
+                <a:latin typeface="Trebuchet MS"/>
               </a:rPr>
               <a:t>A wide, busy but orderly village landscape, read left to right, with ten clear scenes: (1) a field of maize, beans and pumpkin growing together with a fruit tree; (2) a woman farmer showing neighbours her trench bed; (3) chickens scratching under fruit trees beside the garden; (4) a compost heap next to a bed (no bags of fertiliser); (5) kitchen scraps…</a:t>
             </a:r>
@@ -5783,7 +5783,7 @@
     <p:bg>
       <p:bgPr>
         <a:solidFill>
-          <a:srgbClr val="F7F2E9"/>
+          <a:srgbClr val="C9A77C"/>
         </a:solidFill>
         <a:effectLst/>
       </p:bgPr>
@@ -5825,9 +5825,9 @@
             <a:r>
               <a:rPr sz="1000" b="0">
                 <a:solidFill>
-                  <a:srgbClr val="6B6255"/>
-                </a:solidFill>
-                <a:latin typeface="Arial"/>
+                  <a:srgbClr val="1C1C1C"/>
+                </a:solidFill>
+                <a:latin typeface="Trebuchet MS"/>
               </a:rPr>
               <a:t>T-D1-11   ·   Poster T-P19</a:t>
             </a:r>
@@ -5864,9 +5864,9 @@
             <a:r>
               <a:rPr sz="1000" b="0">
                 <a:solidFill>
-                  <a:srgbClr val="6B6255"/>
-                </a:solidFill>
-                <a:latin typeface="Arial"/>
+                  <a:srgbClr val="1C1C1C"/>
+                </a:solidFill>
+                <a:latin typeface="Trebuchet MS"/>
               </a:rPr>
               <a:t>Teach the Teachers</a:t>
             </a:r>
@@ -5903,9 +5903,9 @@
             <a:r>
               <a:rPr sz="3800" b="1">
                 <a:solidFill>
-                  <a:srgbClr val="1F4D2B"/>
-                </a:solidFill>
-                <a:latin typeface="Georgia"/>
+                  <a:srgbClr val="1C1C1C"/>
+                </a:solidFill>
+                <a:latin typeface="Segoe Print"/>
               </a:rPr>
               <a:t>Ten elements, twelve principles</a:t>
             </a:r>
@@ -5927,7 +5927,7 @@
             <a:avLst/>
           </a:prstGeom>
           <a:solidFill>
-            <a:srgbClr val="E2D8C4"/>
+            <a:srgbClr val="2C6FB7"/>
           </a:solidFill>
           <a:ln>
             <a:noFill/>
@@ -5986,9 +5986,9 @@
             <a:r>
               <a:rPr sz="2400" b="0">
                 <a:solidFill>
-                  <a:srgbClr val="20190F"/>
-                </a:solidFill>
-                <a:latin typeface="Arial"/>
+                  <a:srgbClr val="1C1C1C"/>
+                </a:solidFill>
+                <a:latin typeface="Trebuchet MS"/>
               </a:rPr>
               <a:t>•  Agroecology: practice and food system</a:t>
             </a:r>
@@ -6002,9 +6002,9 @@
             <a:r>
               <a:rPr sz="2400" b="0">
                 <a:solidFill>
-                  <a:srgbClr val="20190F"/>
-                </a:solidFill>
-                <a:latin typeface="Arial"/>
+                  <a:srgbClr val="1C1C1C"/>
+                </a:solidFill>
+                <a:latin typeface="Trebuchet MS"/>
               </a:rPr>
               <a:t>•  Permaculture: ethics and design toolbox</a:t>
             </a:r>
@@ -6018,9 +6018,9 @@
             <a:r>
               <a:rPr sz="2400" b="0">
                 <a:solidFill>
-                  <a:srgbClr val="20190F"/>
-                </a:solidFill>
-                <a:latin typeface="Arial"/>
+                  <a:srgbClr val="1C1C1C"/>
+                </a:solidFill>
+                <a:latin typeface="Trebuchet MS"/>
               </a:rPr>
               <a:t>•  We use both</a:t>
             </a:r>
@@ -6042,11 +6042,11 @@
             <a:avLst/>
           </a:prstGeom>
           <a:solidFill>
-            <a:srgbClr val="FBF6EC"/>
+            <a:srgbClr val="C9A77C"/>
           </a:solidFill>
           <a:ln w="15875">
             <a:solidFill>
-              <a:srgbClr val="E2D8C4"/>
+              <a:srgbClr val="2C6FB7"/>
             </a:solidFill>
           </a:ln>
           <a:effectLst/>
@@ -6103,9 +6103,9 @@
             <a:r>
               <a:rPr sz="1200" b="1">
                 <a:solidFill>
-                  <a:srgbClr val="C07A1E"/>
-                </a:solidFill>
-                <a:latin typeface="Arial"/>
+                  <a:srgbClr val="D2452C"/>
+                </a:solidFill>
+                <a:latin typeface="Trebuchet MS"/>
               </a:rPr>
               <a:t>POSTER ART · T-P20-ART · coming</a:t>
             </a:r>
@@ -6142,9 +6142,9 @@
             <a:r>
               <a:rPr sz="1800" b="1">
                 <a:solidFill>
-                  <a:srgbClr val="1F4D2B"/>
-                </a:solidFill>
-                <a:latin typeface="Georgia"/>
+                  <a:srgbClr val="1C1C1C"/>
+                </a:solidFill>
+                <a:latin typeface="Segoe Print"/>
               </a:rPr>
               <a:t>Artwork for T-P20 · Twelve design principles</a:t>
             </a:r>
@@ -6181,9 +6181,9 @@
             <a:r>
               <a:rPr sz="1100" b="0">
                 <a:solidFill>
-                  <a:srgbClr val="20190F"/>
-                </a:solidFill>
-                <a:latin typeface="Arial"/>
+                  <a:srgbClr val="1C1C1C"/>
+                </a:solidFill>
+                <a:latin typeface="Trebuchet MS"/>
               </a:rPr>
               <a:t>A homestead seen from above in the centre (house, tank, beds, fruit trees, chicken run, swale on the slope), surrounded by twelve small round vignettes like a clock face: (1) a woman sitting watching her yard; (2) a tank full of water and a seed jar; (3) a hand picking spinach; (4) a person checking a flooded bed and redirecting water; (5) the sun and…</a:t>
             </a:r>
@@ -6204,7 +6204,7 @@
     <p:bg>
       <p:bgPr>
         <a:solidFill>
-          <a:srgbClr val="F7F2E9"/>
+          <a:srgbClr val="C9A77C"/>
         </a:solidFill>
         <a:effectLst/>
       </p:bgPr>
@@ -6246,9 +6246,9 @@
             <a:r>
               <a:rPr sz="1000" b="0">
                 <a:solidFill>
-                  <a:srgbClr val="6B6255"/>
-                </a:solidFill>
-                <a:latin typeface="Arial"/>
+                  <a:srgbClr val="1C1C1C"/>
+                </a:solidFill>
+                <a:latin typeface="Trebuchet MS"/>
               </a:rPr>
               <a:t>T-D1-12   ·   Poster T-P04</a:t>
             </a:r>
@@ -6285,9 +6285,9 @@
             <a:r>
               <a:rPr sz="1000" b="0">
                 <a:solidFill>
-                  <a:srgbClr val="6B6255"/>
-                </a:solidFill>
-                <a:latin typeface="Arial"/>
+                  <a:srgbClr val="1C1C1C"/>
+                </a:solidFill>
+                <a:latin typeface="Trebuchet MS"/>
               </a:rPr>
               <a:t>Teach the Teachers</a:t>
             </a:r>
@@ -6324,9 +6324,9 @@
             <a:r>
               <a:rPr sz="3800" b="1">
                 <a:solidFill>
-                  <a:srgbClr val="1F4D2B"/>
-                </a:solidFill>
-                <a:latin typeface="Georgia"/>
+                  <a:srgbClr val="1C1C1C"/>
+                </a:solidFill>
+                <a:latin typeface="Segoe Print"/>
               </a:rPr>
               <a:t>Step out: unpack</a:t>
             </a:r>
@@ -6348,7 +6348,7 @@
             <a:avLst/>
           </a:prstGeom>
           <a:solidFill>
-            <a:srgbClr val="E2D8C4"/>
+            <a:srgbClr val="2C6FB7"/>
           </a:solidFill>
           <a:ln>
             <a:noFill/>
@@ -6407,9 +6407,9 @@
             <a:r>
               <a:rPr sz="2400" b="0">
                 <a:solidFill>
-                  <a:srgbClr val="20190F"/>
-                </a:solidFill>
-                <a:latin typeface="Arial"/>
+                  <a:srgbClr val="1C1C1C"/>
+                </a:solidFill>
+                <a:latin typeface="Trebuchet MS"/>
               </a:rPr>
               <a:t>•  How many talk minutes?</a:t>
             </a:r>
@@ -6423,9 +6423,9 @@
             <a:r>
               <a:rPr sz="2400" b="0">
                 <a:solidFill>
-                  <a:srgbClr val="20190F"/>
-                </a:solidFill>
-                <a:latin typeface="Arial"/>
+                  <a:srgbClr val="1C1C1C"/>
+                </a:solidFill>
+                <a:latin typeface="Trebuchet MS"/>
               </a:rPr>
               <a:t>•  What did the teacher do?</a:t>
             </a:r>
@@ -6439,9 +6439,9 @@
             <a:r>
               <a:rPr sz="2400" b="0">
                 <a:solidFill>
-                  <a:srgbClr val="20190F"/>
-                </a:solidFill>
-                <a:latin typeface="Arial"/>
+                  <a:srgbClr val="1C1C1C"/>
+                </a:solidFill>
+                <a:latin typeface="Trebuchet MS"/>
               </a:rPr>
               <a:t>•  Which element are you unsure of?</a:t>
             </a:r>
@@ -6463,11 +6463,11 @@
             <a:avLst/>
           </a:prstGeom>
           <a:solidFill>
-            <a:srgbClr val="FBF6EC"/>
+            <a:srgbClr val="C9A77C"/>
           </a:solidFill>
           <a:ln w="15875">
             <a:solidFill>
-              <a:srgbClr val="E2D8C4"/>
+              <a:srgbClr val="2C6FB7"/>
             </a:solidFill>
           </a:ln>
           <a:effectLst/>
@@ -6524,9 +6524,9 @@
             <a:r>
               <a:rPr sz="1200" b="1">
                 <a:solidFill>
-                  <a:srgbClr val="C07A1E"/>
-                </a:solidFill>
-                <a:latin typeface="Arial"/>
+                  <a:srgbClr val="D2452C"/>
+                </a:solidFill>
+                <a:latin typeface="Trebuchet MS"/>
               </a:rPr>
               <a:t>POSTER ART · T-P04-ART · coming</a:t>
             </a:r>
@@ -6563,9 +6563,9 @@
             <a:r>
               <a:rPr sz="1800" b="1">
                 <a:solidFill>
-                  <a:srgbClr val="1F4D2B"/>
-                </a:solidFill>
-                <a:latin typeface="Georgia"/>
+                  <a:srgbClr val="1C1C1C"/>
+                </a:solidFill>
+                <a:latin typeface="Segoe Print"/>
               </a:rPr>
               <a:t>Artwork for T-P04 · The teacher-talk meter</a:t>
             </a:r>
@@ -6602,9 +6602,9 @@
             <a:r>
               <a:rPr sz="1100" b="0">
                 <a:solidFill>
-                  <a:srgbClr val="20190F"/>
-                </a:solidFill>
-                <a:latin typeface="Arial"/>
+                  <a:srgbClr val="1C1C1C"/>
+                </a:solidFill>
+                <a:latin typeface="Trebuchet MS"/>
               </a:rPr>
               <a:t>Top half: a big half-circle gauge, like a fuel gauge, split into ten equal wedges — three Ochre wedges on the left, seven Leaf-green wedges on the right (the Leaf wedges also carry small dot pattern so it works in black and white). A thick Ink needle points into the third Ochre wedge. Bottom half: a facilitator stands to one side with an open hand…</a:t>
             </a:r>
@@ -6625,7 +6625,7 @@
     <p:bg>
       <p:bgPr>
         <a:solidFill>
-          <a:srgbClr val="1F4D2B"/>
+          <a:srgbClr val="2F3A33"/>
         </a:solidFill>
         <a:effectLst/>
       </p:bgPr>
@@ -6667,9 +6667,9 @@
             <a:r>
               <a:rPr sz="1000" b="0">
                 <a:solidFill>
-                  <a:srgbClr val="A8D88A"/>
-                </a:solidFill>
-                <a:latin typeface="Arial"/>
+                  <a:srgbClr val="F2EFE6"/>
+                </a:solidFill>
+                <a:latin typeface="Trebuchet MS"/>
               </a:rPr>
               <a:t>T-D1-13   ·   Poster T-P09</a:t>
             </a:r>
@@ -6706,9 +6706,9 @@
             <a:r>
               <a:rPr sz="1000" b="0">
                 <a:solidFill>
-                  <a:srgbClr val="A8D88A"/>
-                </a:solidFill>
-                <a:latin typeface="Arial"/>
+                  <a:srgbClr val="F2EFE6"/>
+                </a:solidFill>
+                <a:latin typeface="Trebuchet MS"/>
               </a:rPr>
               <a:t>Teach the Teachers</a:t>
             </a:r>
@@ -6745,9 +6745,9 @@
             <a:r>
               <a:rPr sz="4800" b="1">
                 <a:solidFill>
-                  <a:srgbClr val="F7F2E9"/>
-                </a:solidFill>
-                <a:latin typeface="Georgia"/>
+                  <a:srgbClr val="F2EFE6"/>
+                </a:solidFill>
+                <a:latin typeface="Segoe Print"/>
               </a:rPr>
               <a:t>Poster studio</a:t>
             </a:r>
@@ -6769,7 +6769,7 @@
             <a:avLst/>
           </a:prstGeom>
           <a:solidFill>
-            <a:srgbClr val="C07A1E"/>
+            <a:srgbClr val="D2452C"/>
           </a:solidFill>
           <a:ln>
             <a:noFill/>
@@ -6828,9 +6828,9 @@
             <a:r>
               <a:rPr sz="2400" b="0">
                 <a:solidFill>
-                  <a:srgbClr val="A8D88A"/>
-                </a:solidFill>
-                <a:latin typeface="Arial"/>
+                  <a:srgbClr val="F2EFE6"/>
+                </a:solidFill>
+                <a:latin typeface="Trebuchet MS"/>
               </a:rPr>
               <a:t>A poster that teaches</a:t>
             </a:r>
@@ -6852,11 +6852,11 @@
             <a:avLst/>
           </a:prstGeom>
           <a:solidFill>
-            <a:srgbClr val="FBF6EC"/>
+            <a:srgbClr val="C9A77C"/>
           </a:solidFill>
           <a:ln w="15875">
             <a:solidFill>
-              <a:srgbClr val="E2D8C4"/>
+              <a:srgbClr val="2C6FB7"/>
             </a:solidFill>
           </a:ln>
           <a:effectLst/>
@@ -6913,9 +6913,9 @@
             <a:r>
               <a:rPr sz="1200" b="1">
                 <a:solidFill>
-                  <a:srgbClr val="C07A1E"/>
-                </a:solidFill>
-                <a:latin typeface="Arial"/>
+                  <a:srgbClr val="D2452C"/>
+                </a:solidFill>
+                <a:latin typeface="Trebuchet MS"/>
               </a:rPr>
               <a:t>IMAGE · T-IMG-06 · coming</a:t>
             </a:r>
@@ -6952,9 +6952,9 @@
             <a:r>
               <a:rPr sz="1800" b="1">
                 <a:solidFill>
-                  <a:srgbClr val="1F4D2B"/>
-                </a:solidFill>
-                <a:latin typeface="Georgia"/>
+                  <a:srgbClr val="1C1C1C"/>
+                </a:solidFill>
+                <a:latin typeface="Segoe Print"/>
               </a:rPr>
               <a:t>The poster studio</a:t>
             </a:r>
@@ -6991,9 +6991,9 @@
             <a:r>
               <a:rPr sz="1100" b="0">
                 <a:solidFill>
-                  <a:srgbClr val="20190F"/>
-                </a:solidFill>
-                <a:latin typeface="Arial"/>
+                  <a:srgbClr val="1C1C1C"/>
+                </a:solidFill>
+                <a:latin typeface="Trebuchet MS"/>
               </a:rPr>
               <a:t>Seen from slightly above: trainees kneel and sit on a clean hall floor around large sheets of paper, drawing posters with thick markers. One sheet shows a pencilled bean plant with numbered circles; another person holds a finished poster up at arm's length while a partner stands far away checking it. Markers, rulers, Prestik and paper offcuts scattered.…</a:t>
             </a:r>
@@ -7014,7 +7014,7 @@
     <p:bg>
       <p:bgPr>
         <a:solidFill>
-          <a:srgbClr val="F7F2E9"/>
+          <a:srgbClr val="C9A77C"/>
         </a:solidFill>
         <a:effectLst/>
       </p:bgPr>
@@ -7056,9 +7056,9 @@
             <a:r>
               <a:rPr sz="1000" b="0">
                 <a:solidFill>
-                  <a:srgbClr val="6B6255"/>
-                </a:solidFill>
-                <a:latin typeface="Arial"/>
+                  <a:srgbClr val="1C1C1C"/>
+                </a:solidFill>
+                <a:latin typeface="Trebuchet MS"/>
               </a:rPr>
               <a:t>T-D1-14   ·   Poster T-P09</a:t>
             </a:r>
@@ -7095,9 +7095,9 @@
             <a:r>
               <a:rPr sz="1000" b="0">
                 <a:solidFill>
-                  <a:srgbClr val="6B6255"/>
-                </a:solidFill>
-                <a:latin typeface="Arial"/>
+                  <a:srgbClr val="1C1C1C"/>
+                </a:solidFill>
+                <a:latin typeface="Trebuchet MS"/>
               </a:rPr>
               <a:t>Teach the Teachers</a:t>
             </a:r>
@@ -7134,9 +7134,9 @@
             <a:r>
               <a:rPr sz="3800" b="1">
                 <a:solidFill>
-                  <a:srgbClr val="1F4D2B"/>
-                </a:solidFill>
-                <a:latin typeface="Georgia"/>
+                  <a:srgbClr val="1C1C1C"/>
+                </a:solidFill>
+                <a:latin typeface="Segoe Print"/>
               </a:rPr>
               <a:t>Six poster rules</a:t>
             </a:r>
@@ -7158,7 +7158,7 @@
             <a:avLst/>
           </a:prstGeom>
           <a:solidFill>
-            <a:srgbClr val="E2D8C4"/>
+            <a:srgbClr val="2C6FB7"/>
           </a:solidFill>
           <a:ln>
             <a:noFill/>
@@ -7217,9 +7217,9 @@
             <a:r>
               <a:rPr sz="2800" b="0">
                 <a:solidFill>
-                  <a:srgbClr val="20190F"/>
-                </a:solidFill>
-                <a:latin typeface="Arial"/>
+                  <a:srgbClr val="1C1C1C"/>
+                </a:solidFill>
+                <a:latin typeface="Trebuchet MS"/>
               </a:rPr>
               <a:t>•  One idea, 25 words max</a:t>
             </a:r>
@@ -7233,9 +7233,9 @@
             <a:r>
               <a:rPr sz="2800" b="0">
                 <a:solidFill>
-                  <a:srgbClr val="20190F"/>
-                </a:solidFill>
-                <a:latin typeface="Arial"/>
+                  <a:srgbClr val="1C1C1C"/>
+                </a:solidFill>
+                <a:latin typeface="Trebuchet MS"/>
               </a:rPr>
               <a:t>•  Big picture, no words inside</a:t>
             </a:r>
@@ -7249,9 +7249,9 @@
             <a:r>
               <a:rPr sz="2800" b="0">
                 <a:solidFill>
-                  <a:srgbClr val="20190F"/>
-                </a:solidFill>
-                <a:latin typeface="Arial"/>
+                  <a:srgbClr val="1C1C1C"/>
+                </a:solidFill>
+                <a:latin typeface="Trebuchet MS"/>
               </a:rPr>
               <a:t>•  Numbered labels, one question</a:t>
             </a:r>
@@ -7273,11 +7273,11 @@
             <a:avLst/>
           </a:prstGeom>
           <a:solidFill>
-            <a:srgbClr val="FBF6EC"/>
+            <a:srgbClr val="C9A77C"/>
           </a:solidFill>
           <a:ln w="15875">
             <a:solidFill>
-              <a:srgbClr val="E2D8C4"/>
+              <a:srgbClr val="2C6FB7"/>
             </a:solidFill>
           </a:ln>
           <a:effectLst/>
@@ -7334,9 +7334,9 @@
             <a:r>
               <a:rPr sz="1200" b="1">
                 <a:solidFill>
-                  <a:srgbClr val="C07A1E"/>
-                </a:solidFill>
-                <a:latin typeface="Arial"/>
+                  <a:srgbClr val="D2452C"/>
+                </a:solidFill>
+                <a:latin typeface="Trebuchet MS"/>
               </a:rPr>
               <a:t>POSTER ART · T-P09-ART · coming</a:t>
             </a:r>
@@ -7373,9 +7373,9 @@
             <a:r>
               <a:rPr sz="1800" b="1">
                 <a:solidFill>
-                  <a:srgbClr val="1F4D2B"/>
-                </a:solidFill>
-                <a:latin typeface="Georgia"/>
+                  <a:srgbClr val="1C1C1C"/>
+                </a:solidFill>
+                <a:latin typeface="Segoe Print"/>
               </a:rPr>
               <a:t>Artwork for T-P09 · A poster that teaches</a:t>
             </a:r>
@@ -7412,9 +7412,9 @@
             <a:r>
               <a:rPr sz="1100" b="0">
                 <a:solidFill>
-                  <a:srgbClr val="20190F"/>
-                </a:solidFill>
-                <a:latin typeface="Arial"/>
+                  <a:srgbClr val="1C1C1C"/>
+                </a:solidFill>
+                <a:latin typeface="Trebuchet MS"/>
               </a:rPr>
               <a:t>A fence with a teaching poster hung on it by cable ties. The poster is drawn as a simple layout: a dark top band, a big clear drawing of a bean plant with three numbered ochre circles, a band of short grey bars where labels go (bars, not letters), and a thin bar at the bottom. On the ground, a line of six footprints leads away from the fence to a young…</a:t>
             </a:r>
@@ -7435,7 +7435,7 @@
     <p:bg>
       <p:bgPr>
         <a:solidFill>
-          <a:srgbClr val="F7F2E9"/>
+          <a:srgbClr val="C9A77C"/>
         </a:solidFill>
         <a:effectLst/>
       </p:bgPr>
@@ -7477,9 +7477,9 @@
             <a:r>
               <a:rPr sz="1000" b="0">
                 <a:solidFill>
-                  <a:srgbClr val="6B6255"/>
-                </a:solidFill>
-                <a:latin typeface="Arial"/>
+                  <a:srgbClr val="1C1C1C"/>
+                </a:solidFill>
+                <a:latin typeface="Trebuchet MS"/>
               </a:rPr>
               <a:t>T-D1-15   ·   Poster T-P09</a:t>
             </a:r>
@@ -7516,9 +7516,9 @@
             <a:r>
               <a:rPr sz="1000" b="0">
                 <a:solidFill>
-                  <a:srgbClr val="6B6255"/>
-                </a:solidFill>
-                <a:latin typeface="Arial"/>
+                  <a:srgbClr val="1C1C1C"/>
+                </a:solidFill>
+                <a:latin typeface="Trebuchet MS"/>
               </a:rPr>
               <a:t>Teach the Teachers</a:t>
             </a:r>
@@ -7540,7 +7540,7 @@
             <a:avLst/>
           </a:prstGeom>
           <a:solidFill>
-            <a:srgbClr val="C07A1E"/>
+            <a:srgbClr val="D2452C"/>
           </a:solidFill>
           <a:ln>
             <a:noFill/>
@@ -7599,9 +7599,9 @@
             <a:r>
               <a:rPr sz="1400" b="1">
                 <a:solidFill>
-                  <a:srgbClr val="F7F2E9"/>
-                </a:solidFill>
-                <a:latin typeface="Arial"/>
+                  <a:srgbClr val="C9A77C"/>
+                </a:solidFill>
+                <a:latin typeface="Trebuchet MS"/>
               </a:rPr>
               <a:t>YOUR TURN</a:t>
             </a:r>
@@ -7638,9 +7638,9 @@
             <a:r>
               <a:rPr sz="3800" b="1">
                 <a:solidFill>
-                  <a:srgbClr val="1F4D2B"/>
-                </a:solidFill>
-                <a:latin typeface="Georgia"/>
+                  <a:srgbClr val="1C1C1C"/>
+                </a:solidFill>
+                <a:latin typeface="Segoe Print"/>
               </a:rPr>
               <a:t>Draw your poster</a:t>
             </a:r>
@@ -7662,7 +7662,7 @@
             <a:avLst/>
           </a:prstGeom>
           <a:solidFill>
-            <a:srgbClr val="E2D8C4"/>
+            <a:srgbClr val="2C6FB7"/>
           </a:solidFill>
           <a:ln>
             <a:noFill/>
@@ -7721,9 +7721,9 @@
             <a:r>
               <a:rPr sz="3000" b="1">
                 <a:solidFill>
-                  <a:srgbClr val="20190F"/>
-                </a:solidFill>
-                <a:latin typeface="Arial"/>
+                  <a:srgbClr val="1C1C1C"/>
+                </a:solidFill>
+                <a:latin typeface="Trebuchet MS"/>
               </a:rPr>
               <a:t>•  Pick a Round 1 card</a:t>
             </a:r>
@@ -7737,9 +7737,9 @@
             <a:r>
               <a:rPr sz="3000" b="1">
                 <a:solidFill>
-                  <a:srgbClr val="20190F"/>
-                </a:solidFill>
-                <a:latin typeface="Arial"/>
+                  <a:srgbClr val="1C1C1C"/>
+                </a:solidFill>
+                <a:latin typeface="Trebuchet MS"/>
               </a:rPr>
               <a:t>•  Pencil first, 25 minutes</a:t>
             </a:r>
@@ -7753,9 +7753,9 @@
             <a:r>
               <a:rPr sz="3000" b="1">
                 <a:solidFill>
-                  <a:srgbClr val="20190F"/>
-                </a:solidFill>
-                <a:latin typeface="Arial"/>
+                  <a:srgbClr val="1C1C1C"/>
+                </a:solidFill>
+                <a:latin typeface="Trebuchet MS"/>
               </a:rPr>
               <a:t>•  Then the 6-metre check</a:t>
             </a:r>
@@ -7777,11 +7777,11 @@
             <a:avLst/>
           </a:prstGeom>
           <a:solidFill>
-            <a:srgbClr val="FBF6EC"/>
+            <a:srgbClr val="C9A77C"/>
           </a:solidFill>
           <a:ln w="15875">
             <a:solidFill>
-              <a:srgbClr val="E2D8C4"/>
+              <a:srgbClr val="2C6FB7"/>
             </a:solidFill>
           </a:ln>
           <a:effectLst/>
@@ -7838,9 +7838,9 @@
             <a:r>
               <a:rPr sz="1200" b="1">
                 <a:solidFill>
-                  <a:srgbClr val="C07A1E"/>
-                </a:solidFill>
-                <a:latin typeface="Arial"/>
+                  <a:srgbClr val="D2452C"/>
+                </a:solidFill>
+                <a:latin typeface="Trebuchet MS"/>
               </a:rPr>
               <a:t>PHOTO · T-PHO-01 · coming</a:t>
             </a:r>
@@ -7877,9 +7877,9 @@
             <a:r>
               <a:rPr sz="1800" b="1">
                 <a:solidFill>
-                  <a:srgbClr val="1F4D2B"/>
-                </a:solidFill>
-                <a:latin typeface="Georgia"/>
+                  <a:srgbClr val="1C1C1C"/>
+                </a:solidFill>
+                <a:latin typeface="Segoe Print"/>
               </a:rPr>
               <a:t>Trainee-made posters</a:t>
             </a:r>
@@ -7916,9 +7916,9 @@
             <a:r>
               <a:rPr sz="1100" b="0">
                 <a:solidFill>
-                  <a:srgbClr val="20190F"/>
-                </a:solidFill>
-                <a:latin typeface="Arial"/>
+                  <a:srgbClr val="1C1C1C"/>
+                </a:solidFill>
+                <a:latin typeface="Trebuchet MS"/>
               </a:rPr>
               <a:t>Take during the first run of this course, **with POPIA consent** from the makers: 3–4 hand-made trainee posters that follow T-P09 (≤ 25 words, big picture, numbered labels), photographed flat, straight on, in daylight, no people in frame. Until then, use T-IMG-06.</a:t>
             </a:r>
@@ -7939,7 +7939,7 @@
     <p:bg>
       <p:bgPr>
         <a:solidFill>
-          <a:srgbClr val="F7F2E9"/>
+          <a:srgbClr val="C9A77C"/>
         </a:solidFill>
         <a:effectLst/>
       </p:bgPr>
@@ -7981,9 +7981,9 @@
             <a:r>
               <a:rPr sz="1000" b="0">
                 <a:solidFill>
-                  <a:srgbClr val="6B6255"/>
-                </a:solidFill>
-                <a:latin typeface="Arial"/>
+                  <a:srgbClr val="1C1C1C"/>
+                </a:solidFill>
+                <a:latin typeface="Trebuchet MS"/>
               </a:rPr>
               <a:t>T-D1-16   ·   Poster T-P03</a:t>
             </a:r>
@@ -8020,9 +8020,9 @@
             <a:r>
               <a:rPr sz="1000" b="0">
                 <a:solidFill>
-                  <a:srgbClr val="6B6255"/>
-                </a:solidFill>
-                <a:latin typeface="Arial"/>
+                  <a:srgbClr val="1C1C1C"/>
+                </a:solidFill>
+                <a:latin typeface="Trebuchet MS"/>
               </a:rPr>
               <a:t>Teach the Teachers</a:t>
             </a:r>
@@ -8044,7 +8044,7 @@
             <a:avLst/>
           </a:prstGeom>
           <a:solidFill>
-            <a:srgbClr val="C07A1E"/>
+            <a:srgbClr val="D2452C"/>
           </a:solidFill>
           <a:ln>
             <a:noFill/>
@@ -8103,9 +8103,9 @@
             <a:r>
               <a:rPr sz="1400" b="1">
                 <a:solidFill>
-                  <a:srgbClr val="F7F2E9"/>
-                </a:solidFill>
-                <a:latin typeface="Arial"/>
+                  <a:srgbClr val="C9A77C"/>
+                </a:solidFill>
+                <a:latin typeface="Trebuchet MS"/>
               </a:rPr>
               <a:t>YOUR TURN</a:t>
             </a:r>
@@ -8142,9 +8142,9 @@
             <a:r>
               <a:rPr sz="3800" b="1">
                 <a:solidFill>
-                  <a:srgbClr val="1F4D2B"/>
-                </a:solidFill>
-                <a:latin typeface="Georgia"/>
+                  <a:srgbClr val="1C1C1C"/>
+                </a:solidFill>
+                <a:latin typeface="Segoe Print"/>
               </a:rPr>
               <a:t>Micro-teaching Round 1</a:t>
             </a:r>
@@ -8166,7 +8166,7 @@
             <a:avLst/>
           </a:prstGeom>
           <a:solidFill>
-            <a:srgbClr val="E2D8C4"/>
+            <a:srgbClr val="2C6FB7"/>
           </a:solidFill>
           <a:ln>
             <a:noFill/>
@@ -8225,9 +8225,9 @@
             <a:r>
               <a:rPr sz="3000" b="1">
                 <a:solidFill>
-                  <a:srgbClr val="20190F"/>
-                </a:solidFill>
-                <a:latin typeface="Arial"/>
+                  <a:srgbClr val="1C1C1C"/>
+                </a:solidFill>
+                <a:latin typeface="Trebuchet MS"/>
               </a:rPr>
               <a:t>•  5 minutes, solo, your group</a:t>
             </a:r>
@@ -8241,9 +8241,9 @@
             <a:r>
               <a:rPr sz="3000" b="1">
                 <a:solidFill>
-                  <a:srgbClr val="20190F"/>
-                </a:solidFill>
-                <a:latin typeface="Arial"/>
+                  <a:srgbClr val="1C1C1C"/>
+                </a:solidFill>
+                <a:latin typeface="Trebuchet MS"/>
               </a:rPr>
               <a:t>•  Then 5 minutes feedback</a:t>
             </a:r>
@@ -8257,9 +8257,9 @@
             <a:r>
               <a:rPr sz="3000" b="1">
                 <a:solidFill>
-                  <a:srgbClr val="20190F"/>
-                </a:solidFill>
-                <a:latin typeface="Arial"/>
+                  <a:srgbClr val="1C1C1C"/>
+                </a:solidFill>
+                <a:latin typeface="Trebuchet MS"/>
               </a:rPr>
               <a:t>•  Stop on time</a:t>
             </a:r>
@@ -8281,11 +8281,11 @@
             <a:avLst/>
           </a:prstGeom>
           <a:solidFill>
-            <a:srgbClr val="FBF6EC"/>
+            <a:srgbClr val="C9A77C"/>
           </a:solidFill>
           <a:ln w="15875">
             <a:solidFill>
-              <a:srgbClr val="E2D8C4"/>
+              <a:srgbClr val="2C6FB7"/>
             </a:solidFill>
           </a:ln>
           <a:effectLst/>
@@ -8342,9 +8342,9 @@
             <a:r>
               <a:rPr sz="1200" b="1">
                 <a:solidFill>
-                  <a:srgbClr val="C07A1E"/>
-                </a:solidFill>
-                <a:latin typeface="Arial"/>
+                  <a:srgbClr val="D2452C"/>
+                </a:solidFill>
+                <a:latin typeface="Trebuchet MS"/>
               </a:rPr>
               <a:t>IMAGE · T-IMG-05 · coming</a:t>
             </a:r>
@@ -8381,9 +8381,9 @@
             <a:r>
               <a:rPr sz="1800" b="1">
                 <a:solidFill>
-                  <a:srgbClr val="1F4D2B"/>
-                </a:solidFill>
-                <a:latin typeface="Georgia"/>
+                  <a:srgbClr val="1C1C1C"/>
+                </a:solidFill>
+                <a:latin typeface="Segoe Print"/>
               </a:rPr>
               <a:t>A micro-teach in a small circle</a:t>
             </a:r>
@@ -8420,9 +8420,9 @@
             <a:r>
               <a:rPr sz="1100" b="0">
                 <a:solidFill>
-                  <a:srgbClr val="20190F"/>
-                </a:solidFill>
-                <a:latin typeface="Arial"/>
+                  <a:srgbClr val="1C1C1C"/>
+                </a:solidFill>
+                <a:latin typeface="Trebuchet MS"/>
               </a:rPr>
               <a:t>Five adults in a small circle of chairs in the corner of a hall. One young man (teaching) holds up a cut-open 2 ℓ bottle of soil while three peers lean forward, one pouring water. A fourth person, an older woman, sits slightly back with a clipboard, making tally marks (simple strokes). A second person holds up a small red card (the STOP card, no text). A…</a:t>
             </a:r>
@@ -8443,7 +8443,7 @@
     <p:bg>
       <p:bgPr>
         <a:solidFill>
-          <a:srgbClr val="F7F2E9"/>
+          <a:srgbClr val="C9A77C"/>
         </a:solidFill>
         <a:effectLst/>
       </p:bgPr>
@@ -8485,9 +8485,9 @@
             <a:r>
               <a:rPr sz="1000" b="0">
                 <a:solidFill>
-                  <a:srgbClr val="6B6255"/>
-                </a:solidFill>
-                <a:latin typeface="Arial"/>
+                  <a:srgbClr val="1C1C1C"/>
+                </a:solidFill>
+                <a:latin typeface="Trebuchet MS"/>
               </a:rPr>
               <a:t>T-D1-17   ·   Poster T-P10</a:t>
             </a:r>
@@ -8524,9 +8524,9 @@
             <a:r>
               <a:rPr sz="1000" b="0">
                 <a:solidFill>
-                  <a:srgbClr val="6B6255"/>
-                </a:solidFill>
-                <a:latin typeface="Arial"/>
+                  <a:srgbClr val="1C1C1C"/>
+                </a:solidFill>
+                <a:latin typeface="Trebuchet MS"/>
               </a:rPr>
               <a:t>Teach the Teachers</a:t>
             </a:r>
@@ -8563,9 +8563,9 @@
             <a:r>
               <a:rPr sz="3800" b="1">
                 <a:solidFill>
-                  <a:srgbClr val="1F4D2B"/>
-                </a:solidFill>
-                <a:latin typeface="Georgia"/>
+                  <a:srgbClr val="1C1C1C"/>
+                </a:solidFill>
+                <a:latin typeface="Segoe Print"/>
               </a:rPr>
               <a:t>Two stars and a wish</a:t>
             </a:r>
@@ -8587,7 +8587,7 @@
             <a:avLst/>
           </a:prstGeom>
           <a:solidFill>
-            <a:srgbClr val="E2D8C4"/>
+            <a:srgbClr val="2C6FB7"/>
           </a:solidFill>
           <a:ln>
             <a:noFill/>
@@ -8646,9 +8646,9 @@
             <a:r>
               <a:rPr sz="2800" b="0">
                 <a:solidFill>
-                  <a:srgbClr val="20190F"/>
-                </a:solidFill>
-                <a:latin typeface="Arial"/>
+                  <a:srgbClr val="1C1C1C"/>
+                </a:solidFill>
+                <a:latin typeface="Trebuchet MS"/>
               </a:rPr>
               <a:t>•  Teacher speaks first</a:t>
             </a:r>
@@ -8662,9 +8662,9 @@
             <a:r>
               <a:rPr sz="2800" b="0">
                 <a:solidFill>
-                  <a:srgbClr val="20190F"/>
-                </a:solidFill>
-                <a:latin typeface="Arial"/>
+                  <a:srgbClr val="1C1C1C"/>
+                </a:solidFill>
+                <a:latin typeface="Trebuchet MS"/>
               </a:rPr>
               <a:t>•  Two stars, one wish</a:t>
             </a:r>
@@ -8678,9 +8678,9 @@
             <a:r>
               <a:rPr sz="2800" b="0">
                 <a:solidFill>
-                  <a:srgbClr val="20190F"/>
-                </a:solidFill>
-                <a:latin typeface="Arial"/>
+                  <a:srgbClr val="1C1C1C"/>
+                </a:solidFill>
+                <a:latin typeface="Trebuchet MS"/>
               </a:rPr>
               <a:t>•  Say thank you</a:t>
             </a:r>
@@ -8702,11 +8702,11 @@
             <a:avLst/>
           </a:prstGeom>
           <a:solidFill>
-            <a:srgbClr val="FBF6EC"/>
+            <a:srgbClr val="C9A77C"/>
           </a:solidFill>
           <a:ln w="15875">
             <a:solidFill>
-              <a:srgbClr val="E2D8C4"/>
+              <a:srgbClr val="2C6FB7"/>
             </a:solidFill>
           </a:ln>
           <a:effectLst/>
@@ -8763,9 +8763,9 @@
             <a:r>
               <a:rPr sz="1200" b="1">
                 <a:solidFill>
-                  <a:srgbClr val="C07A1E"/>
-                </a:solidFill>
-                <a:latin typeface="Arial"/>
+                  <a:srgbClr val="D2452C"/>
+                </a:solidFill>
+                <a:latin typeface="Trebuchet MS"/>
               </a:rPr>
               <a:t>POSTER ART · T-P10-ART · coming</a:t>
             </a:r>
@@ -8802,9 +8802,9 @@
             <a:r>
               <a:rPr sz="1800" b="1">
                 <a:solidFill>
-                  <a:srgbClr val="1F4D2B"/>
-                </a:solidFill>
-                <a:latin typeface="Georgia"/>
+                  <a:srgbClr val="1C1C1C"/>
+                </a:solidFill>
+                <a:latin typeface="Segoe Print"/>
               </a:rPr>
               <a:t>Artwork for T-P10 · Two stars and a wish</a:t>
             </a:r>
@@ -8841,9 +8841,9 @@
             <a:r>
               <a:rPr sz="1100" b="0">
                 <a:solidFill>
-                  <a:srgbClr val="20190F"/>
-                </a:solidFill>
-                <a:latin typeface="Arial"/>
+                  <a:srgbClr val="1C1C1C"/>
+                </a:solidFill>
+                <a:latin typeface="Trebuchet MS"/>
               </a:rPr>
               <a:t>A small group of four seated in a circle after a lesson. A young woman (the teacher) speaks first, hand open. Opposite her, an older man with a clipboard (the observer) speaks kindly; above him float two big Ochre star shapes and one Leaf-green sprouting seedling shape. The teacher, now with hand on heart, listens and nods. A third person smiles and…</a:t>
             </a:r>
@@ -8864,7 +8864,7 @@
     <p:bg>
       <p:bgPr>
         <a:solidFill>
-          <a:srgbClr val="F7F2E9"/>
+          <a:srgbClr val="C9A77C"/>
         </a:solidFill>
         <a:effectLst/>
       </p:bgPr>
@@ -8906,9 +8906,9 @@
             <a:r>
               <a:rPr sz="1000" b="0">
                 <a:solidFill>
-                  <a:srgbClr val="6B6255"/>
-                </a:solidFill>
-                <a:latin typeface="Arial"/>
+                  <a:srgbClr val="1C1C1C"/>
+                </a:solidFill>
+                <a:latin typeface="Trebuchet MS"/>
               </a:rPr>
               <a:t>T-D1-18   ·   Poster T-P16</a:t>
             </a:r>
@@ -8945,9 +8945,9 @@
             <a:r>
               <a:rPr sz="1000" b="0">
                 <a:solidFill>
-                  <a:srgbClr val="6B6255"/>
-                </a:solidFill>
-                <a:latin typeface="Arial"/>
+                  <a:srgbClr val="1C1C1C"/>
+                </a:solidFill>
+                <a:latin typeface="Trebuchet MS"/>
               </a:rPr>
               <a:t>Teach the Teachers</a:t>
             </a:r>
@@ -8984,9 +8984,9 @@
             <a:r>
               <a:rPr sz="3800" b="1">
                 <a:solidFill>
-                  <a:srgbClr val="1F4D2B"/>
-                </a:solidFill>
-                <a:latin typeface="Georgia"/>
+                  <a:srgbClr val="1C1C1C"/>
+                </a:solidFill>
+                <a:latin typeface="Segoe Print"/>
               </a:rPr>
               <a:t>Course craft: the register</a:t>
             </a:r>
@@ -9008,7 +9008,7 @@
             <a:avLst/>
           </a:prstGeom>
           <a:solidFill>
-            <a:srgbClr val="E2D8C4"/>
+            <a:srgbClr val="2C6FB7"/>
           </a:solidFill>
           <a:ln>
             <a:noFill/>
@@ -9067,9 +9067,9 @@
             <a:r>
               <a:rPr sz="2400" b="0">
                 <a:solidFill>
-                  <a:srgbClr val="20190F"/>
-                </a:solidFill>
-                <a:latin typeface="Arial"/>
+                  <a:srgbClr val="1C1C1C"/>
+                </a:solidFill>
+                <a:latin typeface="Trebuchet MS"/>
               </a:rPr>
               <a:t>•  First in the morning, last at close</a:t>
             </a:r>
@@ -9083,9 +9083,9 @@
             <a:r>
               <a:rPr sz="2400" b="0">
                 <a:solidFill>
-                  <a:srgbClr val="20190F"/>
-                </a:solidFill>
-                <a:latin typeface="Arial"/>
+                  <a:srgbClr val="1C1C1C"/>
+                </a:solidFill>
+                <a:latin typeface="Trebuchet MS"/>
               </a:rPr>
               <a:t>•  Facilitator signs, photo every day</a:t>
             </a:r>
@@ -9099,9 +9099,9 @@
             <a:r>
               <a:rPr sz="2400" b="0">
                 <a:solidFill>
-                  <a:srgbClr val="20190F"/>
-                </a:solidFill>
-                <a:latin typeface="Arial"/>
+                  <a:srgbClr val="1C1C1C"/>
+                </a:solidFill>
+                <a:latin typeface="Trebuchet MS"/>
               </a:rPr>
               <a:t>•  Never from memory</a:t>
             </a:r>
@@ -9123,11 +9123,11 @@
             <a:avLst/>
           </a:prstGeom>
           <a:solidFill>
-            <a:srgbClr val="FBF6EC"/>
+            <a:srgbClr val="C9A77C"/>
           </a:solidFill>
           <a:ln w="15875">
             <a:solidFill>
-              <a:srgbClr val="E2D8C4"/>
+              <a:srgbClr val="2C6FB7"/>
             </a:solidFill>
           </a:ln>
           <a:effectLst/>
@@ -9184,9 +9184,9 @@
             <a:r>
               <a:rPr sz="1200" b="1">
                 <a:solidFill>
-                  <a:srgbClr val="C07A1E"/>
-                </a:solidFill>
-                <a:latin typeface="Arial"/>
+                  <a:srgbClr val="D2452C"/>
+                </a:solidFill>
+                <a:latin typeface="Trebuchet MS"/>
               </a:rPr>
               <a:t>IMAGE · T-IMG-15 · coming</a:t>
             </a:r>
@@ -9223,9 +9223,9 @@
             <a:r>
               <a:rPr sz="1800" b="1">
                 <a:solidFill>
-                  <a:srgbClr val="1F4D2B"/>
-                </a:solidFill>
-                <a:latin typeface="Georgia"/>
+                  <a:srgbClr val="1C1C1C"/>
+                </a:solidFill>
+                <a:latin typeface="Segoe Print"/>
               </a:rPr>
               <a:t>The register at the door</a:t>
             </a:r>
@@ -9262,9 +9262,9 @@
             <a:r>
               <a:rPr sz="1100" b="0">
                 <a:solidFill>
-                  <a:srgbClr val="20190F"/>
-                </a:solidFill>
-                <a:latin typeface="Arial"/>
+                  <a:srgbClr val="1C1C1C"/>
+                </a:solidFill>
+                <a:latin typeface="Trebuchet MS"/>
               </a:rPr>
               <a:t>A small table at a hall doorway in the morning light. A young man signs a register on a clipboard (grid lines, no letters) while an older woman presses her thumb onto an ink pad to mark her name. A facilitator beside them holds name tags; a small sheet of green dot stickers sits on the table. A queue of three learners waits, chatting.</a:t>
             </a:r>
@@ -9285,7 +9285,7 @@
     <p:bg>
       <p:bgPr>
         <a:solidFill>
-          <a:srgbClr val="F7F2E9"/>
+          <a:srgbClr val="C9A77C"/>
         </a:solidFill>
         <a:effectLst/>
       </p:bgPr>
@@ -9327,9 +9327,9 @@
             <a:r>
               <a:rPr sz="1000" b="0">
                 <a:solidFill>
-                  <a:srgbClr val="6B6255"/>
-                </a:solidFill>
-                <a:latin typeface="Arial"/>
+                  <a:srgbClr val="1C1C1C"/>
+                </a:solidFill>
+                <a:latin typeface="Trebuchet MS"/>
               </a:rPr>
               <a:t>T-D1-02   ·   Poster T-P01</a:t>
             </a:r>
@@ -9366,9 +9366,9 @@
             <a:r>
               <a:rPr sz="1000" b="0">
                 <a:solidFill>
-                  <a:srgbClr val="6B6255"/>
-                </a:solidFill>
-                <a:latin typeface="Arial"/>
+                  <a:srgbClr val="1C1C1C"/>
+                </a:solidFill>
+                <a:latin typeface="Trebuchet MS"/>
               </a:rPr>
               <a:t>Teach the Teachers</a:t>
             </a:r>
@@ -9390,7 +9390,7 @@
             <a:avLst/>
           </a:prstGeom>
           <a:solidFill>
-            <a:srgbClr val="C07A1E"/>
+            <a:srgbClr val="D2452C"/>
           </a:solidFill>
           <a:ln>
             <a:noFill/>
@@ -9449,9 +9449,9 @@
             <a:r>
               <a:rPr sz="1400" b="1">
                 <a:solidFill>
-                  <a:srgbClr val="F7F2E9"/>
-                </a:solidFill>
-                <a:latin typeface="Arial"/>
+                  <a:srgbClr val="C9A77C"/>
+                </a:solidFill>
+                <a:latin typeface="Trebuchet MS"/>
               </a:rPr>
               <a:t>YOUR TURN</a:t>
             </a:r>
@@ -9488,9 +9488,9 @@
             <a:r>
               <a:rPr sz="3800" b="1">
                 <a:solidFill>
-                  <a:srgbClr val="1F4D2B"/>
-                </a:solidFill>
-                <a:latin typeface="Georgia"/>
+                  <a:srgbClr val="1C1C1C"/>
+                </a:solidFill>
+                <a:latin typeface="Segoe Print"/>
               </a:rPr>
               <a:t>Name and object</a:t>
             </a:r>
@@ -9512,7 +9512,7 @@
             <a:avLst/>
           </a:prstGeom>
           <a:solidFill>
-            <a:srgbClr val="E2D8C4"/>
+            <a:srgbClr val="2C6FB7"/>
           </a:solidFill>
           <a:ln>
             <a:noFill/>
@@ -9571,9 +9571,9 @@
             <a:r>
               <a:rPr sz="2600" b="1">
                 <a:solidFill>
-                  <a:srgbClr val="20190F"/>
-                </a:solidFill>
-                <a:latin typeface="Arial"/>
+                  <a:srgbClr val="1C1C1C"/>
+                </a:solidFill>
+                <a:latin typeface="Trebuchet MS"/>
               </a:rPr>
               <a:t>•  Your name, where you work</a:t>
             </a:r>
@@ -9587,9 +9587,9 @@
             <a:r>
               <a:rPr sz="2600" b="1">
                 <a:solidFill>
-                  <a:srgbClr val="20190F"/>
-                </a:solidFill>
-                <a:latin typeface="Arial"/>
+                  <a:srgbClr val="1C1C1C"/>
+                </a:solidFill>
+                <a:latin typeface="Trebuchet MS"/>
               </a:rPr>
               <a:t>•  One object you could teach with</a:t>
             </a:r>
@@ -9603,9 +9603,9 @@
             <a:r>
               <a:rPr sz="2600" b="1">
                 <a:solidFill>
-                  <a:srgbClr val="20190F"/>
-                </a:solidFill>
-                <a:latin typeface="Arial"/>
+                  <a:srgbClr val="1C1C1C"/>
+                </a:solidFill>
+                <a:latin typeface="Trebuchet MS"/>
               </a:rPr>
               <a:t>•  30 seconds each</a:t>
             </a:r>
@@ -9627,11 +9627,11 @@
             <a:avLst/>
           </a:prstGeom>
           <a:solidFill>
-            <a:srgbClr val="FBF6EC"/>
+            <a:srgbClr val="C9A77C"/>
           </a:solidFill>
           <a:ln w="15875">
             <a:solidFill>
-              <a:srgbClr val="E2D8C4"/>
+              <a:srgbClr val="2C6FB7"/>
             </a:solidFill>
           </a:ln>
           <a:effectLst/>
@@ -9688,9 +9688,9 @@
             <a:r>
               <a:rPr sz="1200" b="1">
                 <a:solidFill>
-                  <a:srgbClr val="C07A1E"/>
-                </a:solidFill>
-                <a:latin typeface="Arial"/>
+                  <a:srgbClr val="D2452C"/>
+                </a:solidFill>
+                <a:latin typeface="Trebuchet MS"/>
               </a:rPr>
               <a:t>IMAGE · T-IMG-05 · coming</a:t>
             </a:r>
@@ -9727,9 +9727,9 @@
             <a:r>
               <a:rPr sz="1800" b="1">
                 <a:solidFill>
-                  <a:srgbClr val="1F4D2B"/>
-                </a:solidFill>
-                <a:latin typeface="Georgia"/>
+                  <a:srgbClr val="1C1C1C"/>
+                </a:solidFill>
+                <a:latin typeface="Segoe Print"/>
               </a:rPr>
               <a:t>A micro-teach in a small circle</a:t>
             </a:r>
@@ -9766,9 +9766,9 @@
             <a:r>
               <a:rPr sz="1100" b="0">
                 <a:solidFill>
-                  <a:srgbClr val="20190F"/>
-                </a:solidFill>
-                <a:latin typeface="Arial"/>
+                  <a:srgbClr val="1C1C1C"/>
+                </a:solidFill>
+                <a:latin typeface="Trebuchet MS"/>
               </a:rPr>
               <a:t>Five adults in a small circle of chairs in the corner of a hall. One young man (teaching) holds up a cut-open 2 ℓ bottle of soil while three peers lean forward, one pouring water. A fourth person, an older woman, sits slightly back with a clipboard, making tally marks (simple strokes). A second person holds up a small red card (the STOP card, no text). A…</a:t>
             </a:r>
@@ -9789,7 +9789,7 @@
     <p:bg>
       <p:bgPr>
         <a:solidFill>
-          <a:srgbClr val="F7F2E9"/>
+          <a:srgbClr val="C9A77C"/>
         </a:solidFill>
         <a:effectLst/>
       </p:bgPr>
@@ -9831,9 +9831,9 @@
             <a:r>
               <a:rPr sz="1000" b="0">
                 <a:solidFill>
-                  <a:srgbClr val="6B6255"/>
-                </a:solidFill>
-                <a:latin typeface="Arial"/>
+                  <a:srgbClr val="1C1C1C"/>
+                </a:solidFill>
+                <a:latin typeface="Trebuchet MS"/>
               </a:rPr>
               <a:t>T-D1-03   ·   Poster T-P01</a:t>
             </a:r>
@@ -9870,9 +9870,9 @@
             <a:r>
               <a:rPr sz="1000" b="0">
                 <a:solidFill>
-                  <a:srgbClr val="6B6255"/>
-                </a:solidFill>
-                <a:latin typeface="Arial"/>
+                  <a:srgbClr val="1C1C1C"/>
+                </a:solidFill>
+                <a:latin typeface="Trebuchet MS"/>
               </a:rPr>
               <a:t>Teach the Teachers</a:t>
             </a:r>
@@ -9909,9 +9909,9 @@
             <a:r>
               <a:rPr sz="3800" b="1">
                 <a:solidFill>
-                  <a:srgbClr val="1F4D2B"/>
-                </a:solidFill>
-                <a:latin typeface="Georgia"/>
+                  <a:srgbClr val="1C1C1C"/>
+                </a:solidFill>
+                <a:latin typeface="Segoe Print"/>
               </a:rPr>
               <a:t>Our learning agreement</a:t>
             </a:r>
@@ -9933,7 +9933,7 @@
             <a:avLst/>
           </a:prstGeom>
           <a:solidFill>
-            <a:srgbClr val="E2D8C4"/>
+            <a:srgbClr val="2C6FB7"/>
           </a:solidFill>
           <a:ln>
             <a:noFill/>
@@ -9992,9 +9992,9 @@
             <a:r>
               <a:rPr sz="2400" b="0">
                 <a:solidFill>
-                  <a:srgbClr val="20190F"/>
-                </a:solidFill>
-                <a:latin typeface="Arial"/>
+                  <a:srgbClr val="1C1C1C"/>
+                </a:solidFill>
+                <a:latin typeface="Trebuchet MS"/>
               </a:rPr>
               <a:t>•  Three rules that help you learn</a:t>
             </a:r>
@@ -10008,9 +10008,9 @@
             <a:r>
               <a:rPr sz="2400" b="0">
                 <a:solidFill>
-                  <a:srgbClr val="20190F"/>
-                </a:solidFill>
-                <a:latin typeface="Arial"/>
+                  <a:srgbClr val="1C1C1C"/>
+                </a:solidFill>
+                <a:latin typeface="Trebuchet MS"/>
               </a:rPr>
               <a:t>•  One idea per sticky note</a:t>
             </a:r>
@@ -10024,9 +10024,9 @@
             <a:r>
               <a:rPr sz="2400" b="0">
                 <a:solidFill>
-                  <a:srgbClr val="20190F"/>
-                </a:solidFill>
-                <a:latin typeface="Arial"/>
+                  <a:srgbClr val="1C1C1C"/>
+                </a:solidFill>
+                <a:latin typeface="Trebuchet MS"/>
               </a:rPr>
               <a:t>•  We made it, we keep it</a:t>
             </a:r>
@@ -10048,11 +10048,11 @@
             <a:avLst/>
           </a:prstGeom>
           <a:solidFill>
-            <a:srgbClr val="FBF6EC"/>
+            <a:srgbClr val="C9A77C"/>
           </a:solidFill>
           <a:ln w="15875">
             <a:solidFill>
-              <a:srgbClr val="E2D8C4"/>
+              <a:srgbClr val="2C6FB7"/>
             </a:solidFill>
           </a:ln>
           <a:effectLst/>
@@ -10109,9 +10109,9 @@
             <a:r>
               <a:rPr sz="1200" b="1">
                 <a:solidFill>
-                  <a:srgbClr val="C07A1E"/>
-                </a:solidFill>
-                <a:latin typeface="Arial"/>
+                  <a:srgbClr val="D2452C"/>
+                </a:solidFill>
+                <a:latin typeface="Trebuchet MS"/>
               </a:rPr>
               <a:t>POSTER ART · T-P01-ART · coming</a:t>
             </a:r>
@@ -10148,9 +10148,9 @@
             <a:r>
               <a:rPr sz="1800" b="1">
                 <a:solidFill>
-                  <a:srgbClr val="1F4D2B"/>
-                </a:solidFill>
-                <a:latin typeface="Georgia"/>
+                  <a:srgbClr val="1C1C1C"/>
+                </a:solidFill>
+                <a:latin typeface="Segoe Print"/>
               </a:rPr>
               <a:t>Artwork for T-P01 · Our learning agreement</a:t>
             </a:r>
@@ -10187,9 +10187,9 @@
             <a:r>
               <a:rPr sz="1100" b="0">
                 <a:solidFill>
-                  <a:srgbClr val="20190F"/>
-                </a:solidFill>
-                <a:latin typeface="Arial"/>
+                  <a:srgbClr val="1C1C1C"/>
+                </a:solidFill>
+                <a:latin typeface="Trebuchet MS"/>
               </a:rPr>
               <a:t>Top 45% only. Eight adults of mixed ages sit in a circle on low chairs and a bench under a wide shade tree; a gogo in a headscarf, a young man in a cap, a woman with a notebook, an older man with a walking stick, two young women, an extension officer in a work shirt. In the centre, all their hands rest together on a large blank sheet of paper on the…</a:t>
             </a:r>
@@ -10210,7 +10210,7 @@
     <p:bg>
       <p:bgPr>
         <a:solidFill>
-          <a:srgbClr val="F7F2E9"/>
+          <a:srgbClr val="C9A77C"/>
         </a:solidFill>
         <a:effectLst/>
       </p:bgPr>
@@ -10252,9 +10252,9 @@
             <a:r>
               <a:rPr sz="1000" b="0">
                 <a:solidFill>
-                  <a:srgbClr val="6B6255"/>
-                </a:solidFill>
-                <a:latin typeface="Arial"/>
+                  <a:srgbClr val="1C1C1C"/>
+                </a:solidFill>
+                <a:latin typeface="Trebuchet MS"/>
               </a:rPr>
               <a:t>T-D1-04   ·   Poster T-P02</a:t>
             </a:r>
@@ -10291,9 +10291,9 @@
             <a:r>
               <a:rPr sz="1000" b="0">
                 <a:solidFill>
-                  <a:srgbClr val="6B6255"/>
-                </a:solidFill>
-                <a:latin typeface="Arial"/>
+                  <a:srgbClr val="1C1C1C"/>
+                </a:solidFill>
+                <a:latin typeface="Trebuchet MS"/>
               </a:rPr>
               <a:t>Teach the Teachers</a:t>
             </a:r>
@@ -10315,7 +10315,7 @@
             <a:avLst/>
           </a:prstGeom>
           <a:solidFill>
-            <a:srgbClr val="C07A1E"/>
+            <a:srgbClr val="D2452C"/>
           </a:solidFill>
           <a:ln>
             <a:noFill/>
@@ -10374,9 +10374,9 @@
             <a:r>
               <a:rPr sz="1400" b="1">
                 <a:solidFill>
-                  <a:srgbClr val="F7F2E9"/>
-                </a:solidFill>
-                <a:latin typeface="Arial"/>
+                  <a:srgbClr val="C9A77C"/>
+                </a:solidFill>
+                <a:latin typeface="Trebuchet MS"/>
               </a:rPr>
               <a:t>YOUR TURN</a:t>
             </a:r>
@@ -10413,9 +10413,9 @@
             <a:r>
               <a:rPr sz="3800" b="1">
                 <a:solidFill>
-                  <a:srgbClr val="1F4D2B"/>
-                </a:solidFill>
-                <a:latin typeface="Georgia"/>
+                  <a:srgbClr val="1C1C1C"/>
+                </a:solidFill>
+                <a:latin typeface="Segoe Print"/>
               </a:rPr>
               <a:t>Your best teacher</a:t>
             </a:r>
@@ -10437,7 +10437,7 @@
             <a:avLst/>
           </a:prstGeom>
           <a:solidFill>
-            <a:srgbClr val="E2D8C4"/>
+            <a:srgbClr val="2C6FB7"/>
           </a:solidFill>
           <a:ln>
             <a:noFill/>
@@ -10496,9 +10496,9 @@
             <a:r>
               <a:rPr sz="3000" b="1">
                 <a:solidFill>
-                  <a:srgbClr val="20190F"/>
-                </a:solidFill>
-                <a:latin typeface="Arial"/>
+                  <a:srgbClr val="1C1C1C"/>
+                </a:solidFill>
+                <a:latin typeface="Trebuchet MS"/>
               </a:rPr>
               <a:t>•  Best teacher you ever had</a:t>
             </a:r>
@@ -10512,9 +10512,9 @@
             <a:r>
               <a:rPr sz="3000" b="1">
                 <a:solidFill>
-                  <a:srgbClr val="20190F"/>
-                </a:solidFill>
-                <a:latin typeface="Arial"/>
+                  <a:srgbClr val="1C1C1C"/>
+                </a:solidFill>
+                <a:latin typeface="Trebuchet MS"/>
               </a:rPr>
               <a:t>•  What did they do?</a:t>
             </a:r>
@@ -10528,9 +10528,9 @@
             <a:r>
               <a:rPr sz="3000" b="1">
                 <a:solidFill>
-                  <a:srgbClr val="20190F"/>
-                </a:solidFill>
-                <a:latin typeface="Arial"/>
+                  <a:srgbClr val="1C1C1C"/>
+                </a:solidFill>
+                <a:latin typeface="Trebuchet MS"/>
               </a:rPr>
               <a:t>•  Pairs, 3 minutes</a:t>
             </a:r>
@@ -10552,11 +10552,11 @@
             <a:avLst/>
           </a:prstGeom>
           <a:solidFill>
-            <a:srgbClr val="FBF6EC"/>
+            <a:srgbClr val="C9A77C"/>
           </a:solidFill>
           <a:ln w="15875">
             <a:solidFill>
-              <a:srgbClr val="E2D8C4"/>
+              <a:srgbClr val="2C6FB7"/>
             </a:solidFill>
           </a:ln>
           <a:effectLst/>
@@ -10613,9 +10613,9 @@
             <a:r>
               <a:rPr sz="1200" b="1">
                 <a:solidFill>
-                  <a:srgbClr val="C07A1E"/>
-                </a:solidFill>
-                <a:latin typeface="Arial"/>
+                  <a:srgbClr val="D2452C"/>
+                </a:solidFill>
+                <a:latin typeface="Trebuchet MS"/>
               </a:rPr>
               <a:t>IMAGE · T-IMG-01 · coming</a:t>
             </a:r>
@@ -10652,9 +10652,9 @@
             <a:r>
               <a:rPr sz="1800" b="1">
                 <a:solidFill>
-                  <a:srgbClr val="1F4D2B"/>
-                </a:solidFill>
-                <a:latin typeface="Georgia"/>
+                  <a:srgbClr val="1C1C1C"/>
+                </a:solidFill>
+                <a:latin typeface="Segoe Print"/>
               </a:rPr>
               <a:t>A learning circle under a tree</a:t>
             </a:r>
@@ -10691,9 +10691,9 @@
             <a:r>
               <a:rPr sz="1100" b="0">
                 <a:solidFill>
-                  <a:srgbClr val="20190F"/>
-                </a:solidFill>
-                <a:latin typeface="Arial"/>
+                  <a:srgbClr val="1C1C1C"/>
+                </a:solidFill>
+                <a:latin typeface="Trebuchet MS"/>
               </a:rPr>
               <a:t>Twenty adults sit in a wide circle on plastic chairs and a wooden bench under a big shade tree beside a rural community hall. Mixed ages: young graduates in trainers and T-shirts, two extension officers in work shirts, gogos in headscarves, an older lead farmer in a hat. One young woman stands, mid-sentence, hands open; others lean in, some laughing.…</a:t>
             </a:r>
@@ -10714,7 +10714,7 @@
     <p:bg>
       <p:bgPr>
         <a:solidFill>
-          <a:srgbClr val="F7F2E9"/>
+          <a:srgbClr val="C9A77C"/>
         </a:solidFill>
         <a:effectLst/>
       </p:bgPr>
@@ -10756,9 +10756,9 @@
             <a:r>
               <a:rPr sz="1000" b="0">
                 <a:solidFill>
-                  <a:srgbClr val="6B6255"/>
-                </a:solidFill>
-                <a:latin typeface="Arial"/>
+                  <a:srgbClr val="1C1C1C"/>
+                </a:solidFill>
+                <a:latin typeface="Trebuchet MS"/>
               </a:rPr>
               <a:t>T-D1-05   ·   Poster T-P02</a:t>
             </a:r>
@@ -10795,9 +10795,9 @@
             <a:r>
               <a:rPr sz="1000" b="0">
                 <a:solidFill>
-                  <a:srgbClr val="6B6255"/>
-                </a:solidFill>
-                <a:latin typeface="Arial"/>
+                  <a:srgbClr val="1C1C1C"/>
+                </a:solidFill>
+                <a:latin typeface="Trebuchet MS"/>
               </a:rPr>
               <a:t>Teach the Teachers</a:t>
             </a:r>
@@ -10819,7 +10819,7 @@
             <a:avLst/>
           </a:prstGeom>
           <a:solidFill>
-            <a:srgbClr val="C07A1E"/>
+            <a:srgbClr val="D2452C"/>
           </a:solidFill>
           <a:ln>
             <a:noFill/>
@@ -10878,9 +10878,9 @@
             <a:r>
               <a:rPr sz="1400" b="1">
                 <a:solidFill>
-                  <a:srgbClr val="F7F2E9"/>
-                </a:solidFill>
-                <a:latin typeface="Arial"/>
+                  <a:srgbClr val="C9A77C"/>
+                </a:solidFill>
+                <a:latin typeface="Trebuchet MS"/>
               </a:rPr>
               <a:t>YOUR TURN</a:t>
             </a:r>
@@ -10917,9 +10917,9 @@
             <a:r>
               <a:rPr sz="3800" b="1">
                 <a:solidFill>
-                  <a:srgbClr val="1F4D2B"/>
-                </a:solidFill>
-                <a:latin typeface="Georgia"/>
+                  <a:srgbClr val="1C1C1C"/>
+                </a:solidFill>
+                <a:latin typeface="Segoe Print"/>
               </a:rPr>
               <a:t>Fold a seed envelope</a:t>
             </a:r>
@@ -10941,7 +10941,7 @@
             <a:avLst/>
           </a:prstGeom>
           <a:solidFill>
-            <a:srgbClr val="E2D8C4"/>
+            <a:srgbClr val="2C6FB7"/>
           </a:solidFill>
           <a:ln>
             <a:noFill/>
@@ -11000,9 +11000,9 @@
             <a:r>
               <a:rPr sz="3000" b="1">
                 <a:solidFill>
-                  <a:srgbClr val="20190F"/>
-                </a:solidFill>
-                <a:latin typeface="Arial"/>
+                  <a:srgbClr val="1C1C1C"/>
+                </a:solidFill>
+                <a:latin typeface="Trebuchet MS"/>
               </a:rPr>
               <a:t>•  Room A: tell only</a:t>
             </a:r>
@@ -11016,9 +11016,9 @@
             <a:r>
               <a:rPr sz="3000" b="1">
                 <a:solidFill>
-                  <a:srgbClr val="20190F"/>
-                </a:solidFill>
-                <a:latin typeface="Arial"/>
+                  <a:srgbClr val="1C1C1C"/>
+                </a:solidFill>
+                <a:latin typeface="Trebuchet MS"/>
               </a:rPr>
               <a:t>•  Outside: show and try</a:t>
             </a:r>
@@ -11032,9 +11032,9 @@
             <a:r>
               <a:rPr sz="3000" b="1">
                 <a:solidFill>
-                  <a:srgbClr val="20190F"/>
-                </a:solidFill>
-                <a:latin typeface="Arial"/>
+                  <a:srgbClr val="1C1C1C"/>
+                </a:solidFill>
+                <a:latin typeface="Trebuchet MS"/>
               </a:rPr>
               <a:t>•  Compare your envelopes</a:t>
             </a:r>
@@ -11056,11 +11056,11 @@
             <a:avLst/>
           </a:prstGeom>
           <a:solidFill>
-            <a:srgbClr val="FBF6EC"/>
+            <a:srgbClr val="C9A77C"/>
           </a:solidFill>
           <a:ln w="15875">
             <a:solidFill>
-              <a:srgbClr val="E2D8C4"/>
+              <a:srgbClr val="2C6FB7"/>
             </a:solidFill>
           </a:ln>
           <a:effectLst/>
@@ -11117,9 +11117,9 @@
             <a:r>
               <a:rPr sz="1200" b="1">
                 <a:solidFill>
-                  <a:srgbClr val="C07A1E"/>
-                </a:solidFill>
-                <a:latin typeface="Arial"/>
+                  <a:srgbClr val="D2452C"/>
+                </a:solidFill>
+                <a:latin typeface="Trebuchet MS"/>
               </a:rPr>
               <a:t>IMAGE · T-IMG-06 · coming</a:t>
             </a:r>
@@ -11156,9 +11156,9 @@
             <a:r>
               <a:rPr sz="1800" b="1">
                 <a:solidFill>
-                  <a:srgbClr val="1F4D2B"/>
-                </a:solidFill>
-                <a:latin typeface="Georgia"/>
+                  <a:srgbClr val="1C1C1C"/>
+                </a:solidFill>
+                <a:latin typeface="Segoe Print"/>
               </a:rPr>
               <a:t>The poster studio</a:t>
             </a:r>
@@ -11195,9 +11195,9 @@
             <a:r>
               <a:rPr sz="1100" b="0">
                 <a:solidFill>
-                  <a:srgbClr val="20190F"/>
-                </a:solidFill>
-                <a:latin typeface="Arial"/>
+                  <a:srgbClr val="1C1C1C"/>
+                </a:solidFill>
+                <a:latin typeface="Trebuchet MS"/>
               </a:rPr>
               <a:t>Seen from slightly above: trainees kneel and sit on a clean hall floor around large sheets of paper, drawing posters with thick markers. One sheet shows a pencilled bean plant with numbered circles; another person holds a finished poster up at arm's length while a partner stands far away checking it. Markers, rulers, Prestik and paper offcuts scattered.…</a:t>
             </a:r>
@@ -11218,7 +11218,7 @@
     <p:bg>
       <p:bgPr>
         <a:solidFill>
-          <a:srgbClr val="F7F2E9"/>
+          <a:srgbClr val="C9A77C"/>
         </a:solidFill>
         <a:effectLst/>
       </p:bgPr>
@@ -11260,9 +11260,9 @@
             <a:r>
               <a:rPr sz="1000" b="0">
                 <a:solidFill>
-                  <a:srgbClr val="6B6255"/>
-                </a:solidFill>
-                <a:latin typeface="Arial"/>
+                  <a:srgbClr val="1C1C1C"/>
+                </a:solidFill>
+                <a:latin typeface="Trebuchet MS"/>
               </a:rPr>
               <a:t>T-D1-06   ·   Poster T-P02</a:t>
             </a:r>
@@ -11299,9 +11299,9 @@
             <a:r>
               <a:rPr sz="1000" b="0">
                 <a:solidFill>
-                  <a:srgbClr val="6B6255"/>
-                </a:solidFill>
-                <a:latin typeface="Arial"/>
+                  <a:srgbClr val="1C1C1C"/>
+                </a:solidFill>
+                <a:latin typeface="Trebuchet MS"/>
               </a:rPr>
               <a:t>Teach the Teachers</a:t>
             </a:r>
@@ -11338,9 +11338,9 @@
             <a:r>
               <a:rPr sz="3800" b="1">
                 <a:solidFill>
-                  <a:srgbClr val="1F4D2B"/>
-                </a:solidFill>
-                <a:latin typeface="Georgia"/>
+                  <a:srgbClr val="1C1C1C"/>
+                </a:solidFill>
+                <a:latin typeface="Segoe Print"/>
               </a:rPr>
               <a:t>How adults learn</a:t>
             </a:r>
@@ -11362,7 +11362,7 @@
             <a:avLst/>
           </a:prstGeom>
           <a:solidFill>
-            <a:srgbClr val="E2D8C4"/>
+            <a:srgbClr val="2C6FB7"/>
           </a:solidFill>
           <a:ln>
             <a:noFill/>
@@ -11421,9 +11421,9 @@
             <a:r>
               <a:rPr sz="2800" b="0">
                 <a:solidFill>
-                  <a:srgbClr val="20190F"/>
-                </a:solidFill>
-                <a:latin typeface="Arial"/>
+                  <a:srgbClr val="1C1C1C"/>
+                </a:solidFill>
+                <a:latin typeface="Trebuchet MS"/>
               </a:rPr>
               <a:t>•  Do · Look back</a:t>
             </a:r>
@@ -11437,9 +11437,9 @@
             <a:r>
               <a:rPr sz="2800" b="0">
                 <a:solidFill>
-                  <a:srgbClr val="20190F"/>
-                </a:solidFill>
-                <a:latin typeface="Arial"/>
+                  <a:srgbClr val="1C1C1C"/>
+                </a:solidFill>
+                <a:latin typeface="Trebuchet MS"/>
               </a:rPr>
               <a:t>•  Make sense · Use it</a:t>
             </a:r>
@@ -11453,9 +11453,9 @@
             <a:r>
               <a:rPr sz="2800" b="0">
                 <a:solidFill>
-                  <a:srgbClr val="20190F"/>
-                </a:solidFill>
-                <a:latin typeface="Arial"/>
+                  <a:srgbClr val="1C1C1C"/>
+                </a:solidFill>
+                <a:latin typeface="Trebuchet MS"/>
               </a:rPr>
               <a:t>•  Go all the way round</a:t>
             </a:r>
@@ -11477,11 +11477,11 @@
             <a:avLst/>
           </a:prstGeom>
           <a:solidFill>
-            <a:srgbClr val="FBF6EC"/>
+            <a:srgbClr val="C9A77C"/>
           </a:solidFill>
           <a:ln w="15875">
             <a:solidFill>
-              <a:srgbClr val="E2D8C4"/>
+              <a:srgbClr val="2C6FB7"/>
             </a:solidFill>
           </a:ln>
           <a:effectLst/>
@@ -11538,9 +11538,9 @@
             <a:r>
               <a:rPr sz="1200" b="1">
                 <a:solidFill>
-                  <a:srgbClr val="C07A1E"/>
-                </a:solidFill>
-                <a:latin typeface="Arial"/>
+                  <a:srgbClr val="D2452C"/>
+                </a:solidFill>
+                <a:latin typeface="Trebuchet MS"/>
               </a:rPr>
               <a:t>ANIMATION · T-ANI-01 · coming</a:t>
             </a:r>
@@ -11577,9 +11577,9 @@
             <a:r>
               <a:rPr sz="1800" b="1">
                 <a:solidFill>
-                  <a:srgbClr val="1F4D2B"/>
-                </a:solidFill>
-                <a:latin typeface="Georgia"/>
+                  <a:srgbClr val="1C1C1C"/>
+                </a:solidFill>
+                <a:latin typeface="Segoe Print"/>
               </a:rPr>
               <a:t>The learning cycle</a:t>
             </a:r>
@@ -11616,9 +11616,9 @@
             <a:r>
               <a:rPr sz="1100" b="0">
                 <a:solidFill>
-                  <a:srgbClr val="20190F"/>
-                </a:solidFill>
-                <a:latin typeface="Arial"/>
+                  <a:srgbClr val="1C1C1C"/>
+                </a:solidFill>
+                <a:latin typeface="Trebuchet MS"/>
               </a:rPr>
               <a:t>Four scenes appear in turn around a circle, joined by a Mid-green arrow that grows clockwise: (1) hands fold a paper seed envelope (0–4 s); (2) two people look at the torn envelope, one points (4–8 s); (3) a small group draws in the soil with a stick, one nods (8–12 s); (4) at a kitchen table, bean seed pours into a finished envelope (12–16 s); the arrow…</a:t>
             </a:r>
@@ -11639,7 +11639,7 @@
     <p:bg>
       <p:bgPr>
         <a:solidFill>
-          <a:srgbClr val="F7F2E9"/>
+          <a:srgbClr val="C9A77C"/>
         </a:solidFill>
         <a:effectLst/>
       </p:bgPr>
@@ -11681,9 +11681,9 @@
             <a:r>
               <a:rPr sz="1000" b="0">
                 <a:solidFill>
-                  <a:srgbClr val="6B6255"/>
-                </a:solidFill>
-                <a:latin typeface="Arial"/>
+                  <a:srgbClr val="1C1C1C"/>
+                </a:solidFill>
+                <a:latin typeface="Trebuchet MS"/>
               </a:rPr>
               <a:t>T-D1-07   ·   Poster T-P03</a:t>
             </a:r>
@@ -11720,9 +11720,9 @@
             <a:r>
               <a:rPr sz="1000" b="0">
                 <a:solidFill>
-                  <a:srgbClr val="6B6255"/>
-                </a:solidFill>
-                <a:latin typeface="Arial"/>
+                  <a:srgbClr val="1C1C1C"/>
+                </a:solidFill>
+                <a:latin typeface="Trebuchet MS"/>
               </a:rPr>
               <a:t>Teach the Teachers</a:t>
             </a:r>
@@ -11759,9 +11759,9 @@
             <a:r>
               <a:rPr sz="3800" b="1">
                 <a:solidFill>
-                  <a:srgbClr val="1F4D2B"/>
-                </a:solidFill>
-                <a:latin typeface="Georgia"/>
+                  <a:srgbClr val="1C1C1C"/>
+                </a:solidFill>
+                <a:latin typeface="Segoe Print"/>
               </a:rPr>
               <a:t>Look · Try · Talk · Take home</a:t>
             </a:r>
@@ -11783,7 +11783,7 @@
             <a:avLst/>
           </a:prstGeom>
           <a:solidFill>
-            <a:srgbClr val="E2D8C4"/>
+            <a:srgbClr val="2C6FB7"/>
           </a:solidFill>
           <a:ln>
             <a:noFill/>
@@ -11842,9 +11842,9 @@
             <a:r>
               <a:rPr sz="2800" b="0">
                 <a:solidFill>
-                  <a:srgbClr val="20190F"/>
-                </a:solidFill>
-                <a:latin typeface="Arial"/>
+                  <a:srgbClr val="1C1C1C"/>
+                </a:solidFill>
+                <a:latin typeface="Trebuchet MS"/>
               </a:rPr>
               <a:t>•  Hook them · Hands on</a:t>
             </a:r>
@@ -11858,9 +11858,9 @@
             <a:r>
               <a:rPr sz="2800" b="0">
                 <a:solidFill>
-                  <a:srgbClr val="20190F"/>
-                </a:solidFill>
-                <a:latin typeface="Arial"/>
+                  <a:srgbClr val="1C1C1C"/>
+                </a:solidFill>
+                <a:latin typeface="Trebuchet MS"/>
               </a:rPr>
               <a:t>•  Three questions · One action</a:t>
             </a:r>
@@ -11874,9 +11874,9 @@
             <a:r>
               <a:rPr sz="2800" b="0">
                 <a:solidFill>
-                  <a:srgbClr val="20190F"/>
-                </a:solidFill>
-                <a:latin typeface="Arial"/>
+                  <a:srgbClr val="1C1C1C"/>
+                </a:solidFill>
+                <a:latin typeface="Trebuchet MS"/>
               </a:rPr>
               <a:t>•  Try comes first</a:t>
             </a:r>
@@ -11898,11 +11898,11 @@
             <a:avLst/>
           </a:prstGeom>
           <a:solidFill>
-            <a:srgbClr val="FBF6EC"/>
+            <a:srgbClr val="C9A77C"/>
           </a:solidFill>
           <a:ln w="15875">
             <a:solidFill>
-              <a:srgbClr val="E2D8C4"/>
+              <a:srgbClr val="2C6FB7"/>
             </a:solidFill>
           </a:ln>
           <a:effectLst/>
@@ -11959,9 +11959,9 @@
             <a:r>
               <a:rPr sz="1200" b="1">
                 <a:solidFill>
-                  <a:srgbClr val="C07A1E"/>
-                </a:solidFill>
-                <a:latin typeface="Arial"/>
+                  <a:srgbClr val="D2452C"/>
+                </a:solidFill>
+                <a:latin typeface="Trebuchet MS"/>
               </a:rPr>
               <a:t>POSTER ART · T-P03-ART · coming</a:t>
             </a:r>
@@ -11998,9 +11998,9 @@
             <a:r>
               <a:rPr sz="1800" b="1">
                 <a:solidFill>
-                  <a:srgbClr val="1F4D2B"/>
-                </a:solidFill>
-                <a:latin typeface="Georgia"/>
+                  <a:srgbClr val="1C1C1C"/>
+                </a:solidFill>
+                <a:latin typeface="Segoe Print"/>
               </a:rPr>
               <a:t>Artwork for T-P03 · Every lesson: Look · Try · Talk · Take home</a:t>
             </a:r>
@@ -12037,9 +12037,9 @@
             <a:r>
               <a:rPr sz="1100" b="0">
                 <a:solidFill>
-                  <a:srgbClr val="20190F"/>
-                </a:solidFill>
-                <a:latin typeface="Arial"/>
+                  <a:srgbClr val="1C1C1C"/>
+                </a:solidFill>
+                <a:latin typeface="Trebuchet MS"/>
               </a:rPr>
               <a:t>Four horizontal bands stacked top to bottom, one scene each, same people throughout. ① A facilitator holds up a real cabbage leaf with holes; seated learners lean forward, two pointing. ② A group of five kneels at a bed, every pair of hands in the soil, the facilitator standing back, hands behind her back. ③ The group sits in a circle beside a poster on…</a:t>
             </a:r>
@@ -12060,7 +12060,7 @@
     <p:bg>
       <p:bgPr>
         <a:solidFill>
-          <a:srgbClr val="1F4D2B"/>
+          <a:srgbClr val="2F3A33"/>
         </a:solidFill>
         <a:effectLst/>
       </p:bgPr>
@@ -12102,9 +12102,9 @@
             <a:r>
               <a:rPr sz="1000" b="0">
                 <a:solidFill>
-                  <a:srgbClr val="A8D88A"/>
-                </a:solidFill>
-                <a:latin typeface="Arial"/>
+                  <a:srgbClr val="F2EFE6"/>
+                </a:solidFill>
+                <a:latin typeface="Trebuchet MS"/>
               </a:rPr>
               <a:t>T-D1-08   ·   Poster T-P04</a:t>
             </a:r>
@@ -12141,9 +12141,9 @@
             <a:r>
               <a:rPr sz="1000" b="0">
                 <a:solidFill>
-                  <a:srgbClr val="A8D88A"/>
-                </a:solidFill>
-                <a:latin typeface="Arial"/>
+                  <a:srgbClr val="F2EFE6"/>
+                </a:solidFill>
+                <a:latin typeface="Trebuchet MS"/>
               </a:rPr>
               <a:t>Teach the Teachers</a:t>
             </a:r>
@@ -12180,9 +12180,9 @@
             <a:r>
               <a:rPr sz="4800" b="1">
                 <a:solidFill>
-                  <a:srgbClr val="F7F2E9"/>
-                </a:solidFill>
-                <a:latin typeface="Georgia"/>
+                  <a:srgbClr val="F2EFE6"/>
+                </a:solidFill>
+                <a:latin typeface="Segoe Print"/>
               </a:rPr>
               <a:t>Model lesson</a:t>
             </a:r>
@@ -12204,7 +12204,7 @@
             <a:avLst/>
           </a:prstGeom>
           <a:solidFill>
-            <a:srgbClr val="C07A1E"/>
+            <a:srgbClr val="D2452C"/>
           </a:solidFill>
           <a:ln>
             <a:noFill/>
@@ -12263,9 +12263,9 @@
             <a:r>
               <a:rPr sz="2400" b="0">
                 <a:solidFill>
-                  <a:srgbClr val="A8D88A"/>
-                </a:solidFill>
-                <a:latin typeface="Arial"/>
+                  <a:srgbClr val="F2EFE6"/>
+                </a:solidFill>
+                <a:latin typeface="Trebuchet MS"/>
               </a:rPr>
               <a:t>You are farmers now</a:t>
             </a:r>
@@ -12279,9 +12279,9 @@
             <a:r>
               <a:rPr sz="2400" b="0">
                 <a:solidFill>
-                  <a:srgbClr val="A8D88A"/>
-                </a:solidFill>
-                <a:latin typeface="Arial"/>
+                  <a:srgbClr val="F2EFE6"/>
+                </a:solidFill>
+                <a:latin typeface="Trebuchet MS"/>
               </a:rPr>
               <a:t>Recorders: count teacher talk</a:t>
             </a:r>
@@ -12303,11 +12303,11 @@
             <a:avLst/>
           </a:prstGeom>
           <a:solidFill>
-            <a:srgbClr val="FBF6EC"/>
+            <a:srgbClr val="C9A77C"/>
           </a:solidFill>
           <a:ln w="15875">
             <a:solidFill>
-              <a:srgbClr val="E2D8C4"/>
+              <a:srgbClr val="2C6FB7"/>
             </a:solidFill>
           </a:ln>
           <a:effectLst/>
@@ -12364,9 +12364,9 @@
             <a:r>
               <a:rPr sz="1200" b="1">
                 <a:solidFill>
-                  <a:srgbClr val="C07A1E"/>
-                </a:solidFill>
-                <a:latin typeface="Arial"/>
+                  <a:srgbClr val="D2452C"/>
+                </a:solidFill>
+                <a:latin typeface="Trebuchet MS"/>
               </a:rPr>
               <a:t>IMAGE · T-IMG-15 · coming</a:t>
             </a:r>
@@ -12403,9 +12403,9 @@
             <a:r>
               <a:rPr sz="1800" b="1">
                 <a:solidFill>
-                  <a:srgbClr val="1F4D2B"/>
-                </a:solidFill>
-                <a:latin typeface="Georgia"/>
+                  <a:srgbClr val="1C1C1C"/>
+                </a:solidFill>
+                <a:latin typeface="Segoe Print"/>
               </a:rPr>
               <a:t>The register at the door</a:t>
             </a:r>
@@ -12442,9 +12442,9 @@
             <a:r>
               <a:rPr sz="1100" b="0">
                 <a:solidFill>
-                  <a:srgbClr val="20190F"/>
-                </a:solidFill>
-                <a:latin typeface="Arial"/>
+                  <a:srgbClr val="1C1C1C"/>
+                </a:solidFill>
+                <a:latin typeface="Trebuchet MS"/>
               </a:rPr>
               <a:t>A small table at a hall doorway in the morning light. A young man signs a register on a clipboard (grid lines, no letters) while an older woman presses her thumb onto an ink pad to mark her name. A facilitator beside them holds name tags; a small sheet of green dot stickers sits on the table. A queue of three learners waits, chatting.</a:t>
             </a:r>
@@ -12465,7 +12465,7 @@
     <p:bg>
       <p:bgPr>
         <a:solidFill>
-          <a:srgbClr val="F7F2E9"/>
+          <a:srgbClr val="C9A77C"/>
         </a:solidFill>
         <a:effectLst/>
       </p:bgPr>
@@ -12507,9 +12507,9 @@
             <a:r>
               <a:rPr sz="1000" b="0">
                 <a:solidFill>
-                  <a:srgbClr val="6B6255"/>
-                </a:solidFill>
-                <a:latin typeface="Arial"/>
+                  <a:srgbClr val="1C1C1C"/>
+                </a:solidFill>
+                <a:latin typeface="Trebuchet MS"/>
               </a:rPr>
               <a:t>T-D1-09   ·   Poster F-P03</a:t>
             </a:r>
@@ -12546,9 +12546,9 @@
             <a:r>
               <a:rPr sz="1000" b="0">
                 <a:solidFill>
-                  <a:srgbClr val="6B6255"/>
-                </a:solidFill>
-                <a:latin typeface="Arial"/>
+                  <a:srgbClr val="1C1C1C"/>
+                </a:solidFill>
+                <a:latin typeface="Trebuchet MS"/>
               </a:rPr>
               <a:t>Teach the Teachers</a:t>
             </a:r>
@@ -12585,9 +12585,9 @@
             <a:r>
               <a:rPr sz="3800" b="1">
                 <a:solidFill>
-                  <a:srgbClr val="1F4D2B"/>
-                </a:solidFill>
-                <a:latin typeface="Georgia"/>
+                  <a:srgbClr val="1C1C1C"/>
+                </a:solidFill>
+                <a:latin typeface="Segoe Print"/>
               </a:rPr>
               <a:t>Two gardens</a:t>
             </a:r>
@@ -12609,7 +12609,7 @@
             <a:avLst/>
           </a:prstGeom>
           <a:solidFill>
-            <a:srgbClr val="E2D8C4"/>
+            <a:srgbClr val="2C6FB7"/>
           </a:solidFill>
           <a:ln>
             <a:noFill/>
@@ -12668,9 +12668,9 @@
             <a:r>
               <a:rPr sz="2800" b="0">
                 <a:solidFill>
-                  <a:srgbClr val="20190F"/>
-                </a:solidFill>
-                <a:latin typeface="Arial"/>
+                  <a:srgbClr val="1C1C1C"/>
+                </a:solidFill>
+                <a:latin typeface="Trebuchet MS"/>
               </a:rPr>
               <a:t>•  What differences do you see?</a:t>
             </a:r>
@@ -12684,9 +12684,9 @@
             <a:r>
               <a:rPr sz="2800" b="0">
                 <a:solidFill>
-                  <a:srgbClr val="20190F"/>
-                </a:solidFill>
-                <a:latin typeface="Arial"/>
+                  <a:srgbClr val="1C1C1C"/>
+                </a:solidFill>
+                <a:latin typeface="Trebuchet MS"/>
               </a:rPr>
               <a:t>•  Which feeds you in a drought?</a:t>
             </a:r>
@@ -12732,7 +12732,7 @@
             <a:avLst/>
           </a:prstGeom>
           <a:solidFill>
-            <a:srgbClr val="20190F"/>
+            <a:srgbClr val="1C1C1C"/>
           </a:solidFill>
           <a:ln>
             <a:noFill/>
@@ -12791,9 +12791,9 @@
             <a:r>
               <a:rPr sz="1100" b="0">
                 <a:solidFill>
-                  <a:srgbClr val="F7F2E9"/>
-                </a:solidFill>
-                <a:latin typeface="Arial"/>
+                  <a:srgbClr val="C9A77C"/>
+                </a:solidFill>
+                <a:latin typeface="Trebuchet MS"/>
               </a:rPr>
               <a:t>▶  Clip T-ANI-12 · play from the tablet: watch-13-diversity.mp4</a:t>
             </a:r>

--- a/courses/build/teach-the-teachers/T-D1.pptx
+++ b/courses/build/teach-the-teachers/T-D1.pptx
@@ -1872,7 +1872,7 @@
           </a:p>
           <a:p>
             <a:r>
-              <a:t>Clip T-ANI-12: public/course-animations/intro-permaculture/watch-13-diversity.mp4</a:t>
+              <a:t>Clip T-ANI-12: public/course-media/teach-the-teachers/T-ANI-12.mp4</a:t>
             </a:r>
           </a:p>
         </p:txBody>
@@ -12693,49 +12693,27 @@
           </a:p>
         </p:txBody>
       </p:sp>
-      <p:pic>
-        <p:nvPicPr>
-          <p:cNvPr id="7" name="Picture 6" descr="watch-13-diversity.jpg"/>
-          <p:cNvPicPr>
-            <a:picLocks noChangeAspect="1"/>
-          </p:cNvPicPr>
-          <p:nvPr/>
-        </p:nvPicPr>
-        <p:blipFill>
-          <a:blip r:embed="rId2"/>
-          <a:stretch>
-            <a:fillRect/>
-          </a:stretch>
-        </p:blipFill>
-        <p:spPr>
-          <a:xfrm>
-            <a:off x="5852160" y="2308860"/>
-            <a:ext cx="5852160" cy="3291840"/>
-          </a:xfrm>
-          <a:prstGeom prst="rect">
-            <a:avLst/>
-          </a:prstGeom>
-        </p:spPr>
-      </p:pic>
-      <p:sp>
-        <p:nvSpPr>
-          <p:cNvPr id="8" name="Rectangle 7"/>
+      <p:sp>
+        <p:nvSpPr>
+          <p:cNvPr id="7" name="Rectangle 6"/>
           <p:cNvSpPr/>
           <p:nvPr/>
         </p:nvSpPr>
         <p:spPr>
           <a:xfrm>
-            <a:off x="5852160" y="5806440"/>
-            <a:ext cx="5852160" cy="411480"/>
+            <a:off x="5852160" y="1691640"/>
+            <a:ext cx="5852160" cy="4526280"/>
           </a:xfrm>
           <a:prstGeom prst="rect">
             <a:avLst/>
           </a:prstGeom>
           <a:solidFill>
-            <a:srgbClr val="1C1C1C"/>
+            <a:srgbClr val="C9A77C"/>
           </a:solidFill>
-          <a:ln>
-            <a:noFill/>
+          <a:ln w="15875">
+            <a:solidFill>
+              <a:srgbClr val="2C6FB7"/>
+            </a:solidFill>
           </a:ln>
           <a:effectLst/>
         </p:spPr>
@@ -12763,14 +12741,53 @@
       </p:sp>
       <p:sp>
         <p:nvSpPr>
+          <p:cNvPr id="8" name="TextBox 7"/>
+          <p:cNvSpPr txBox="1"/>
+          <p:nvPr/>
+        </p:nvSpPr>
+        <p:spPr>
+          <a:xfrm>
+            <a:off x="6080760" y="1874520"/>
+            <a:ext cx="5394960" cy="365760"/>
+          </a:xfrm>
+          <a:prstGeom prst="rect">
+            <a:avLst/>
+          </a:prstGeom>
+          <a:noFill/>
+        </p:spPr>
+        <p:txBody>
+          <a:bodyPr wrap="square" anchor="t" lIns="45720" rIns="45720">
+            <a:spAutoFit/>
+          </a:bodyPr>
+          <a:lstStyle/>
+          <a:p>
+            <a:pPr algn="l">
+              <a:spcAft>
+                <a:spcPts val="800"/>
+              </a:spcAft>
+            </a:pPr>
+            <a:r>
+              <a:rPr sz="1200" b="1">
+                <a:solidFill>
+                  <a:srgbClr val="D2452C"/>
+                </a:solidFill>
+                <a:latin typeface="Trebuchet MS"/>
+              </a:rPr>
+              <a:t>ANIMATION · T-ANI-12 · coming</a:t>
+            </a:r>
+          </a:p>
+        </p:txBody>
+      </p:sp>
+      <p:sp>
+        <p:nvSpPr>
           <p:cNvPr id="9" name="TextBox 8"/>
           <p:cNvSpPr txBox="1"/>
           <p:nvPr/>
         </p:nvSpPr>
         <p:spPr>
           <a:xfrm>
-            <a:off x="5943600" y="5815584"/>
-            <a:ext cx="5669280" cy="384048"/>
+            <a:off x="6080760" y="2258568"/>
+            <a:ext cx="5394960" cy="457200"/>
           </a:xfrm>
           <a:prstGeom prst="rect">
             <a:avLst/>
@@ -12778,7 +12795,7 @@
           <a:noFill/>
         </p:spPr>
         <p:txBody>
-          <a:bodyPr wrap="square" anchor="ctr" lIns="45720" rIns="45720">
+          <a:bodyPr wrap="square" anchor="t" lIns="45720" rIns="45720">
             <a:spAutoFit/>
           </a:bodyPr>
           <a:lstStyle/>
@@ -12789,13 +12806,52 @@
               </a:spcAft>
             </a:pPr>
             <a:r>
+              <a:rPr sz="1800" b="1">
+                <a:solidFill>
+                  <a:srgbClr val="1C1C1C"/>
+                </a:solidFill>
+                <a:latin typeface="Segoe Print"/>
+              </a:rPr>
+              <a:t>Diversity</a:t>
+            </a:r>
+          </a:p>
+        </p:txBody>
+      </p:sp>
+      <p:sp>
+        <p:nvSpPr>
+          <p:cNvPr id="10" name="TextBox 9"/>
+          <p:cNvSpPr txBox="1"/>
+          <p:nvPr/>
+        </p:nvSpPr>
+        <p:spPr>
+          <a:xfrm>
+            <a:off x="6080760" y="2788920"/>
+            <a:ext cx="5394960" cy="3246120"/>
+          </a:xfrm>
+          <a:prstGeom prst="rect">
+            <a:avLst/>
+          </a:prstGeom>
+          <a:noFill/>
+        </p:spPr>
+        <p:txBody>
+          <a:bodyPr wrap="square" anchor="t" lIns="45720" rIns="45720">
+            <a:spAutoFit/>
+          </a:bodyPr>
+          <a:lstStyle/>
+          <a:p>
+            <a:pPr algn="l">
+              <a:spcAft>
+                <a:spcPts val="800"/>
+              </a:spcAft>
+            </a:pPr>
+            <a:r>
               <a:rPr sz="1100" b="0">
                 <a:solidFill>
-                  <a:srgbClr val="C9A77C"/>
+                  <a:srgbClr val="1C1C1C"/>
                 </a:solidFill>
                 <a:latin typeface="Trebuchet MS"/>
               </a:rPr>
-              <a:t>▶  Clip T-ANI-12 · play from the tablet: watch-13-diversity.mp4</a:t>
+              <a:t>A bare row of a single crop wilts as pests arrive; beside it a mixed bed (tall grain, climbing bean, spreading pumpkin-like leaves, flowers) stays green while ladybirds and birds visit. Seasons pass and the mixed bed keeps producing. (Replaces the withdrawn clip `intro-permaculture/watch-13-diversity.mp4`.)</a:t>
             </a:r>
           </a:p>
         </p:txBody>
